--- a/Class_Presentation.pptx
+++ b/Class_Presentation.pptx
@@ -8,7 +8,7 @@
     <p:notesMasterId r:id="rId4"/>
   </p:notesMasterIdLst>
   <p:handoutMasterIdLst>
-    <p:handoutMasterId r:id="rId17"/>
+    <p:handoutMasterId r:id="rId20"/>
   </p:handoutMasterIdLst>
   <p:sldIdLst>
     <p:sldId id="257" r:id="rId3"/>
@@ -20,10 +20,13 @@
     <p:sldId id="291" r:id="rId10"/>
     <p:sldId id="271" r:id="rId11"/>
     <p:sldId id="292" r:id="rId12"/>
-    <p:sldId id="294" r:id="rId13"/>
-    <p:sldId id="275" r:id="rId14"/>
+    <p:sldId id="295" r:id="rId13"/>
+    <p:sldId id="297" r:id="rId14"/>
     <p:sldId id="283" r:id="rId15"/>
-    <p:sldId id="262" r:id="rId16"/>
+    <p:sldId id="296" r:id="rId16"/>
+    <p:sldId id="294" r:id="rId17"/>
+    <p:sldId id="275" r:id="rId18"/>
+    <p:sldId id="262" r:id="rId19"/>
   </p:sldIdLst>
   <p:sldSz cx="12192000" cy="6858000"/>
   <p:notesSz cx="6858000" cy="9144000"/>
@@ -1351,6 +1354,117 @@
 </p:notes>
 </file>
 
+<file path=ppt/notesSlides/notesSlide10.xml><?xml version="1.0" encoding="utf-8"?>
+<p:notes xmlns:a="http://schemas.openxmlformats.org/drawingml/2006/main" xmlns:r="http://schemas.openxmlformats.org/officeDocument/2006/relationships" xmlns:p="http://schemas.openxmlformats.org/presentationml/2006/main">
+  <p:cSld>
+    <p:spTree>
+      <p:nvGrpSpPr>
+        <p:cNvPr id="1" name=""/>
+        <p:cNvGrpSpPr/>
+        <p:nvPr/>
+      </p:nvGrpSpPr>
+      <p:grpSpPr/>
+      <p:sp>
+        <p:nvSpPr>
+          <p:cNvPr id="2" name="Slide Image Placeholder 1"/>
+          <p:cNvSpPr>
+            <a:spLocks noGrp="1"/>
+          </p:cNvSpPr>
+          <p:nvPr>
+            <p:ph type="sldImg" idx="2"/>
+          </p:nvPr>
+        </p:nvSpPr>
+        <p:spPr/>
+      </p:sp>
+      <p:sp>
+        <p:nvSpPr>
+          <p:cNvPr id="3" name="Text Placeholder 2"/>
+          <p:cNvSpPr>
+            <a:spLocks noGrp="1"/>
+          </p:cNvSpPr>
+          <p:nvPr>
+            <p:ph type="body" idx="3"/>
+          </p:nvPr>
+        </p:nvSpPr>
+        <p:spPr/>
+        <p:txBody>
+          <a:bodyPr/>
+          <a:p>
+            <a:r>
+              <a:rPr lang="en-US" altLang="en-US"/>
+              <a:t>And now let’s break down the lines here</a:t>
+            </a:r>
+            <a:endParaRPr lang="en-US" altLang="en-US"/>
+          </a:p>
+          <a:p>
+            <a:r>
+              <a:rPr lang="en-US" altLang="en-US"/>
+              <a:t>This small code creates a complete web server. When someone visits the website, it sends back the message ‘Hello, Spring Boot!’ all with just a few lines. Normally, you’d need hundreds of lines to do this, but Spring Boot makes it automatic.</a:t>
+            </a:r>
+            <a:endParaRPr lang="en-US" altLang="en-US"/>
+          </a:p>
+        </p:txBody>
+      </p:sp>
+    </p:spTree>
+  </p:cSld>
+  <p:clrMapOvr>
+    <a:masterClrMapping/>
+  </p:clrMapOvr>
+</p:notes>
+</file>
+
+<file path=ppt/notesSlides/notesSlide11.xml><?xml version="1.0" encoding="utf-8"?>
+<p:notes xmlns:a="http://schemas.openxmlformats.org/drawingml/2006/main" xmlns:r="http://schemas.openxmlformats.org/officeDocument/2006/relationships" xmlns:p="http://schemas.openxmlformats.org/presentationml/2006/main">
+  <p:cSld>
+    <p:spTree>
+      <p:nvGrpSpPr>
+        <p:cNvPr id="1" name=""/>
+        <p:cNvGrpSpPr/>
+        <p:nvPr/>
+      </p:nvGrpSpPr>
+      <p:grpSpPr/>
+      <p:sp>
+        <p:nvSpPr>
+          <p:cNvPr id="2" name="Slide Image Placeholder 1"/>
+          <p:cNvSpPr>
+            <a:spLocks noGrp="1"/>
+          </p:cNvSpPr>
+          <p:nvPr>
+            <p:ph type="sldImg" idx="2"/>
+          </p:nvPr>
+        </p:nvSpPr>
+        <p:spPr/>
+      </p:sp>
+      <p:sp>
+        <p:nvSpPr>
+          <p:cNvPr id="3" name="Text Placeholder 2"/>
+          <p:cNvSpPr>
+            <a:spLocks noGrp="1"/>
+          </p:cNvSpPr>
+          <p:nvPr>
+            <p:ph type="body" idx="3"/>
+          </p:nvPr>
+        </p:nvSpPr>
+        <p:spPr/>
+        <p:txBody>
+          <a:bodyPr/>
+          <a:p>
+            <a:r>
+              <a:rPr lang="en-US" altLang="en-US"/>
+              <a:t>Spring Boot is used by companies like Netflix, Amazon, and Google</a:t>
+            </a:r>
+            <a:endParaRPr lang="en-US" altLang="en-US"/>
+          </a:p>
+        </p:txBody>
+      </p:sp>
+    </p:spTree>
+  </p:cSld>
+  <p:clrMapOvr>
+    <a:masterClrMapping/>
+  </p:clrMapOvr>
+</p:notes>
+</file>
+
 <file path=ppt/notesSlides/notesSlide2.xml><?xml version="1.0" encoding="utf-8"?>
 <p:notes xmlns:a="http://schemas.openxmlformats.org/drawingml/2006/main" xmlns:r="http://schemas.openxmlformats.org/officeDocument/2006/relationships" xmlns:p="http://schemas.openxmlformats.org/presentationml/2006/main">
   <p:cSld>
@@ -1742,10 +1856,10 @@
           <a:bodyPr/>
           <a:p>
             <a:r>
-              <a:rPr lang="en-US" altLang="en-US"/>
-              <a:t>This small code creates a complete web server. When someone visits the website, it sends back the message ‘Hello, Spring Boot!’ all with just a few lines. Normally, you’d need hundreds of lines to do this, but Spring Boot makes it automatic.</a:t>
+              <a:rPr lang="en-US"/>
+              <a:t>As you can see it simple and straightforward.</a:t>
             </a:r>
-            <a:endParaRPr lang="en-US" altLang="en-US"/>
+            <a:endParaRPr lang="en-US"/>
           </a:p>
         </p:txBody>
       </p:sp>
@@ -1794,10 +1908,10 @@
           <a:bodyPr/>
           <a:p>
             <a:r>
-              <a:rPr lang="en-US" altLang="en-US"/>
-              <a:t>That’s why Spring Boot is used by companies like Netflix, Amazon, and Google</a:t>
+              <a:rPr lang="en-US"/>
+              <a:t>As you can see it simple and straightforward.</a:t>
             </a:r>
-            <a:endParaRPr lang="en-US" altLang="en-US"/>
+            <a:endParaRPr lang="en-US"/>
           </a:p>
         </p:txBody>
       </p:sp>
@@ -2908,6 +3022,969 @@
 </file>
 
 <file path=ppt/slides/slide10.xml><?xml version="1.0" encoding="utf-8"?>
+<p:sld xmlns:a="http://schemas.openxmlformats.org/drawingml/2006/main" xmlns:r="http://schemas.openxmlformats.org/officeDocument/2006/relationships" xmlns:p="http://schemas.openxmlformats.org/presentationml/2006/main">
+  <p:cSld>
+    <p:spTree>
+      <p:nvGrpSpPr>
+        <p:cNvPr id="1" name=""/>
+        <p:cNvGrpSpPr/>
+        <p:nvPr/>
+      </p:nvGrpSpPr>
+      <p:grpSpPr/>
+      <p:pic>
+        <p:nvPicPr>
+          <p:cNvPr id="2" name="Picture 1" descr="Screenshot 2025-10-17 at 1.12.25 PM"/>
+          <p:cNvPicPr>
+            <a:picLocks noChangeAspect="1"/>
+          </p:cNvPicPr>
+          <p:nvPr/>
+        </p:nvPicPr>
+        <p:blipFill>
+          <a:blip r:embed="rId1"/>
+          <a:stretch>
+            <a:fillRect/>
+          </a:stretch>
+        </p:blipFill>
+        <p:spPr>
+          <a:xfrm>
+            <a:off x="160655" y="161925"/>
+            <a:ext cx="9124950" cy="6273165"/>
+          </a:xfrm>
+          <a:prstGeom prst="rect">
+            <a:avLst/>
+          </a:prstGeom>
+          <a:ln>
+            <a:solidFill>
+              <a:schemeClr val="bg2">
+                <a:lumMod val="10000"/>
+              </a:schemeClr>
+            </a:solidFill>
+          </a:ln>
+        </p:spPr>
+      </p:pic>
+      <p:grpSp>
+        <p:nvGrpSpPr>
+          <p:cNvPr id="25603" name="组合 42"/>
+          <p:cNvGrpSpPr/>
+          <p:nvPr/>
+        </p:nvGrpSpPr>
+        <p:grpSpPr>
+          <a:xfrm>
+            <a:off x="8584248" y="3230563"/>
+            <a:ext cx="3506787" cy="3508375"/>
+            <a:chOff x="1294435" y="833378"/>
+            <a:chExt cx="3507129" cy="3507129"/>
+          </a:xfrm>
+        </p:grpSpPr>
+        <p:sp>
+          <p:nvSpPr>
+            <p:cNvPr id="44" name="椭圆 43"/>
+            <p:cNvSpPr/>
+            <p:nvPr/>
+          </p:nvSpPr>
+          <p:spPr>
+            <a:xfrm>
+              <a:off x="1294435" y="833378"/>
+              <a:ext cx="3507129" cy="3507129"/>
+            </a:xfrm>
+            <a:prstGeom prst="ellipse">
+              <a:avLst/>
+            </a:prstGeom>
+            <a:solidFill>
+              <a:schemeClr val="tx1">
+                <a:lumMod val="95000"/>
+                <a:lumOff val="5000"/>
+                <a:alpha val="43000"/>
+              </a:schemeClr>
+            </a:solidFill>
+            <a:ln w="38100">
+              <a:solidFill>
+                <a:schemeClr val="bg1">
+                  <a:lumMod val="85000"/>
+                </a:schemeClr>
+              </a:solidFill>
+            </a:ln>
+          </p:spPr>
+          <p:style>
+            <a:lnRef idx="2">
+              <a:schemeClr val="accent1">
+                <a:shade val="50000"/>
+              </a:schemeClr>
+            </a:lnRef>
+            <a:fillRef idx="1">
+              <a:schemeClr val="accent1"/>
+            </a:fillRef>
+            <a:effectRef idx="0">
+              <a:schemeClr val="accent1"/>
+            </a:effectRef>
+            <a:fontRef idx="minor">
+              <a:schemeClr val="lt1"/>
+            </a:fontRef>
+          </p:style>
+          <p:txBody>
+            <a:bodyPr anchor="ctr"/>
+            <a:lstStyle/>
+            <a:p>
+              <a:pPr marL="0" marR="0" lvl="0" indent="0" algn="ctr" defTabSz="914400" rtl="0" eaLnBrk="1" fontAlgn="auto" latinLnBrk="0" hangingPunct="1">
+                <a:lnSpc>
+                  <a:spcPct val="100000"/>
+                </a:lnSpc>
+                <a:spcBef>
+                  <a:spcPts val="0"/>
+                </a:spcBef>
+                <a:spcAft>
+                  <a:spcPts val="0"/>
+                </a:spcAft>
+                <a:buClrTx/>
+                <a:buSzTx/>
+                <a:buFontTx/>
+                <a:buNone/>
+                <a:defRPr/>
+              </a:pPr>
+              <a:endParaRPr kumimoji="0" lang="zh-CN" altLang="en-US" sz="1800" b="0" i="0" u="none" strike="noStrike" kern="1200" cap="none" spc="0" normalizeH="0" baseline="0" noProof="0" dirty="0">
+                <a:ln>
+                  <a:noFill/>
+                </a:ln>
+                <a:solidFill>
+                  <a:prstClr val="white"/>
+                </a:solidFill>
+                <a:effectLst/>
+                <a:uLnTx/>
+                <a:uFillTx/>
+                <a:latin typeface="Calibri"/>
+                <a:ea typeface="SimSun" pitchFamily="2" charset="-122"/>
+                <a:cs typeface="+mn-cs"/>
+              </a:endParaRPr>
+            </a:p>
+          </p:txBody>
+        </p:sp>
+        <p:sp>
+          <p:nvSpPr>
+            <p:cNvPr id="25605" name="矩形 44"/>
+            <p:cNvSpPr/>
+            <p:nvPr/>
+          </p:nvSpPr>
+          <p:spPr>
+            <a:xfrm>
+              <a:off x="1715425" y="2492037"/>
+              <a:ext cx="2665148" cy="929310"/>
+            </a:xfrm>
+            <a:prstGeom prst="rect">
+              <a:avLst/>
+            </a:prstGeom>
+            <a:noFill/>
+            <a:ln w="9525">
+              <a:noFill/>
+            </a:ln>
+          </p:spPr>
+          <p:txBody>
+            <a:bodyPr anchor="t" anchorCtr="0">
+              <a:spAutoFit/>
+            </a:bodyPr>
+            <a:p>
+              <a:pPr algn="ctr"/>
+              <a:r>
+                <a:rPr lang="en-US" altLang="zh-CN" sz="2800" baseline="-25000" dirty="0">
+                  <a:solidFill>
+                    <a:srgbClr val="FFFFFF"/>
+                  </a:solidFill>
+                  <a:latin typeface="Microsoft YaHei" pitchFamily="34" charset="-122"/>
+                  <a:ea typeface="Microsoft YaHei" pitchFamily="34" charset="-122"/>
+                </a:rPr>
+                <a:t>Download the ‘demo’app from the web-site</a:t>
+              </a:r>
+              <a:endParaRPr lang="en-US" altLang="zh-CN" sz="2800" baseline="-25000" dirty="0">
+                <a:solidFill>
+                  <a:srgbClr val="FFFFFF"/>
+                </a:solidFill>
+                <a:latin typeface="Microsoft YaHei" pitchFamily="34" charset="-122"/>
+                <a:ea typeface="Microsoft YaHei" pitchFamily="34" charset="-122"/>
+              </a:endParaRPr>
+            </a:p>
+          </p:txBody>
+        </p:sp>
+        <p:sp>
+          <p:nvSpPr>
+            <p:cNvPr id="25606" name="矩形 45"/>
+            <p:cNvSpPr/>
+            <p:nvPr/>
+          </p:nvSpPr>
+          <p:spPr>
+            <a:xfrm>
+              <a:off x="1823442" y="1630655"/>
+              <a:ext cx="2447529" cy="583358"/>
+            </a:xfrm>
+            <a:prstGeom prst="rect">
+              <a:avLst/>
+            </a:prstGeom>
+            <a:noFill/>
+            <a:ln w="9525">
+              <a:noFill/>
+            </a:ln>
+          </p:spPr>
+          <p:txBody>
+            <a:bodyPr wrap="square" anchor="t" anchorCtr="0">
+              <a:spAutoFit/>
+            </a:bodyPr>
+            <a:p>
+              <a:pPr algn="ctr"/>
+              <a:r>
+                <a:rPr lang="en-US" altLang="zh-CN" sz="3200" b="1" dirty="0">
+                  <a:solidFill>
+                    <a:srgbClr val="FFFFFF"/>
+                  </a:solidFill>
+                  <a:latin typeface="Microsoft YaHei" pitchFamily="34" charset="-122"/>
+                  <a:ea typeface="Microsoft YaHei" pitchFamily="34" charset="-122"/>
+                </a:rPr>
+                <a:t>Demo App</a:t>
+              </a:r>
+              <a:endParaRPr lang="en-US" altLang="zh-CN" sz="3200" b="1" dirty="0">
+                <a:solidFill>
+                  <a:srgbClr val="FFFFFF"/>
+                </a:solidFill>
+                <a:latin typeface="Microsoft YaHei" pitchFamily="34" charset="-122"/>
+                <a:ea typeface="Microsoft YaHei" pitchFamily="34" charset="-122"/>
+              </a:endParaRPr>
+            </a:p>
+          </p:txBody>
+        </p:sp>
+      </p:grpSp>
+    </p:spTree>
+  </p:cSld>
+  <p:clrMapOvr>
+    <a:masterClrMapping/>
+  </p:clrMapOvr>
+</p:sld>
+</file>
+
+<file path=ppt/slides/slide11.xml><?xml version="1.0" encoding="utf-8"?>
+<p:sld xmlns:a="http://schemas.openxmlformats.org/drawingml/2006/main" xmlns:r="http://schemas.openxmlformats.org/officeDocument/2006/relationships" xmlns:p="http://schemas.openxmlformats.org/presentationml/2006/main">
+  <p:cSld>
+    <p:spTree>
+      <p:nvGrpSpPr>
+        <p:cNvPr id="1" name=""/>
+        <p:cNvGrpSpPr/>
+        <p:nvPr/>
+      </p:nvGrpSpPr>
+      <p:grpSpPr/>
+      <p:grpSp>
+        <p:nvGrpSpPr>
+          <p:cNvPr id="25603" name="组合 42"/>
+          <p:cNvGrpSpPr/>
+          <p:nvPr/>
+        </p:nvGrpSpPr>
+        <p:grpSpPr>
+          <a:xfrm>
+            <a:off x="8597583" y="101283"/>
+            <a:ext cx="3506787" cy="3508375"/>
+            <a:chOff x="1294435" y="833378"/>
+            <a:chExt cx="3507129" cy="3507129"/>
+          </a:xfrm>
+        </p:grpSpPr>
+        <p:sp>
+          <p:nvSpPr>
+            <p:cNvPr id="44" name="椭圆 43"/>
+            <p:cNvSpPr/>
+            <p:nvPr/>
+          </p:nvSpPr>
+          <p:spPr>
+            <a:xfrm>
+              <a:off x="1294435" y="833378"/>
+              <a:ext cx="3507129" cy="3507129"/>
+            </a:xfrm>
+            <a:prstGeom prst="ellipse">
+              <a:avLst/>
+            </a:prstGeom>
+            <a:solidFill>
+              <a:schemeClr val="tx1">
+                <a:lumMod val="95000"/>
+                <a:lumOff val="5000"/>
+                <a:alpha val="43000"/>
+              </a:schemeClr>
+            </a:solidFill>
+            <a:ln w="38100">
+              <a:solidFill>
+                <a:schemeClr val="bg1">
+                  <a:lumMod val="85000"/>
+                </a:schemeClr>
+              </a:solidFill>
+            </a:ln>
+          </p:spPr>
+          <p:style>
+            <a:lnRef idx="2">
+              <a:schemeClr val="accent1">
+                <a:shade val="50000"/>
+              </a:schemeClr>
+            </a:lnRef>
+            <a:fillRef idx="1">
+              <a:schemeClr val="accent1"/>
+            </a:fillRef>
+            <a:effectRef idx="0">
+              <a:schemeClr val="accent1"/>
+            </a:effectRef>
+            <a:fontRef idx="minor">
+              <a:schemeClr val="lt1"/>
+            </a:fontRef>
+          </p:style>
+          <p:txBody>
+            <a:bodyPr anchor="ctr"/>
+            <a:lstStyle/>
+            <a:p>
+              <a:pPr marL="0" marR="0" lvl="0" indent="0" algn="ctr" defTabSz="914400" rtl="0" eaLnBrk="1" fontAlgn="auto" latinLnBrk="0" hangingPunct="1">
+                <a:lnSpc>
+                  <a:spcPct val="100000"/>
+                </a:lnSpc>
+                <a:spcBef>
+                  <a:spcPts val="0"/>
+                </a:spcBef>
+                <a:spcAft>
+                  <a:spcPts val="0"/>
+                </a:spcAft>
+                <a:buClrTx/>
+                <a:buSzTx/>
+                <a:buFontTx/>
+                <a:buNone/>
+                <a:defRPr/>
+              </a:pPr>
+              <a:endParaRPr kumimoji="0" lang="zh-CN" altLang="en-US" sz="1800" b="0" i="0" u="none" strike="noStrike" kern="1200" cap="none" spc="0" normalizeH="0" baseline="0" noProof="0" dirty="0">
+                <a:ln>
+                  <a:noFill/>
+                </a:ln>
+                <a:solidFill>
+                  <a:prstClr val="white"/>
+                </a:solidFill>
+                <a:effectLst/>
+                <a:uLnTx/>
+                <a:uFillTx/>
+                <a:latin typeface="Calibri"/>
+                <a:ea typeface="SimSun" pitchFamily="2" charset="-122"/>
+                <a:cs typeface="+mn-cs"/>
+              </a:endParaRPr>
+            </a:p>
+          </p:txBody>
+        </p:sp>
+        <p:sp>
+          <p:nvSpPr>
+            <p:cNvPr id="25605" name="矩形 44"/>
+            <p:cNvSpPr/>
+            <p:nvPr/>
+          </p:nvSpPr>
+          <p:spPr>
+            <a:xfrm>
+              <a:off x="1715481" y="2839265"/>
+              <a:ext cx="2665355" cy="473542"/>
+            </a:xfrm>
+            <a:prstGeom prst="rect">
+              <a:avLst/>
+            </a:prstGeom>
+            <a:noFill/>
+            <a:ln w="9525">
+              <a:noFill/>
+            </a:ln>
+          </p:spPr>
+          <p:txBody>
+            <a:bodyPr anchor="t" anchorCtr="0">
+              <a:noAutofit/>
+            </a:bodyPr>
+            <a:p>
+              <a:pPr algn="ctr"/>
+              <a:r>
+                <a:rPr lang="en-US" altLang="zh-CN" sz="1800" b="1" i="1" dirty="0">
+                  <a:solidFill>
+                    <a:srgbClr val="FFFFFF"/>
+                  </a:solidFill>
+                  <a:latin typeface="Microsoft YaHei" pitchFamily="34" charset="-122"/>
+                  <a:ea typeface="Microsoft YaHei" pitchFamily="34" charset="-122"/>
+                  <a:sym typeface="+mn-ea"/>
+                </a:rPr>
+                <a:t>Spring initializr</a:t>
+              </a:r>
+              <a:endParaRPr lang="en-US" altLang="zh-CN" sz="1800" b="1" i="1" baseline="-25000" dirty="0">
+                <a:solidFill>
+                  <a:srgbClr val="FFFFFF"/>
+                </a:solidFill>
+                <a:latin typeface="Microsoft YaHei" pitchFamily="34" charset="-122"/>
+                <a:ea typeface="Microsoft YaHei" pitchFamily="34" charset="-122"/>
+                <a:sym typeface="+mn-ea"/>
+              </a:endParaRPr>
+            </a:p>
+          </p:txBody>
+        </p:sp>
+        <p:sp>
+          <p:nvSpPr>
+            <p:cNvPr id="25606" name="矩形 45"/>
+            <p:cNvSpPr/>
+            <p:nvPr/>
+          </p:nvSpPr>
+          <p:spPr>
+            <a:xfrm>
+              <a:off x="1714846" y="1551309"/>
+              <a:ext cx="2447529" cy="1075943"/>
+            </a:xfrm>
+            <a:prstGeom prst="rect">
+              <a:avLst/>
+            </a:prstGeom>
+            <a:noFill/>
+            <a:ln w="9525">
+              <a:noFill/>
+            </a:ln>
+          </p:spPr>
+          <p:txBody>
+            <a:bodyPr wrap="square" anchor="t" anchorCtr="0">
+              <a:spAutoFit/>
+            </a:bodyPr>
+            <a:p>
+              <a:pPr algn="ctr"/>
+              <a:r>
+                <a:rPr lang="en-US" altLang="zh-CN" sz="3200" b="1" dirty="0">
+                  <a:solidFill>
+                    <a:srgbClr val="FFFFFF"/>
+                  </a:solidFill>
+                  <a:latin typeface="Microsoft YaHei" pitchFamily="34" charset="-122"/>
+                  <a:ea typeface="Microsoft YaHei" pitchFamily="34" charset="-122"/>
+                </a:rPr>
+                <a:t>Setting up Spring boot</a:t>
+              </a:r>
+              <a:endParaRPr lang="en-US" altLang="zh-CN" sz="3200" b="1" dirty="0">
+                <a:solidFill>
+                  <a:srgbClr val="FFFFFF"/>
+                </a:solidFill>
+                <a:latin typeface="Microsoft YaHei" pitchFamily="34" charset="-122"/>
+                <a:ea typeface="Microsoft YaHei" pitchFamily="34" charset="-122"/>
+              </a:endParaRPr>
+            </a:p>
+          </p:txBody>
+        </p:sp>
+      </p:grpSp>
+      <p:pic>
+        <p:nvPicPr>
+          <p:cNvPr id="4" name="Picture 3" descr="Screenshot 2025-10-17 at 1.14.27 PM"/>
+          <p:cNvPicPr>
+            <a:picLocks noChangeAspect="1"/>
+          </p:cNvPicPr>
+          <p:nvPr/>
+        </p:nvPicPr>
+        <p:blipFill>
+          <a:blip r:embed="rId1"/>
+          <a:stretch>
+            <a:fillRect/>
+          </a:stretch>
+        </p:blipFill>
+        <p:spPr>
+          <a:xfrm>
+            <a:off x="227330" y="315595"/>
+            <a:ext cx="8219440" cy="5652135"/>
+          </a:xfrm>
+          <a:prstGeom prst="rect">
+            <a:avLst/>
+          </a:prstGeom>
+          <a:ln>
+            <a:solidFill>
+              <a:schemeClr val="bg2">
+                <a:lumMod val="10000"/>
+              </a:schemeClr>
+            </a:solidFill>
+          </a:ln>
+        </p:spPr>
+      </p:pic>
+    </p:spTree>
+  </p:cSld>
+  <p:clrMapOvr>
+    <a:masterClrMapping/>
+  </p:clrMapOvr>
+</p:sld>
+</file>
+
+<file path=ppt/slides/slide12.xml><?xml version="1.0" encoding="utf-8"?>
+<p:sld xmlns:a="http://schemas.openxmlformats.org/drawingml/2006/main" xmlns:r="http://schemas.openxmlformats.org/officeDocument/2006/relationships" xmlns:p="http://schemas.openxmlformats.org/presentationml/2006/main">
+  <p:cSld>
+    <p:spTree>
+      <p:nvGrpSpPr>
+        <p:cNvPr id="1" name=""/>
+        <p:cNvGrpSpPr/>
+        <p:nvPr/>
+      </p:nvGrpSpPr>
+      <p:grpSpPr/>
+      <p:grpSp>
+        <p:nvGrpSpPr>
+          <p:cNvPr id="25603" name="组合 42"/>
+          <p:cNvGrpSpPr/>
+          <p:nvPr/>
+        </p:nvGrpSpPr>
+        <p:grpSpPr>
+          <a:xfrm>
+            <a:off x="-317" y="80963"/>
+            <a:ext cx="3506787" cy="3508375"/>
+            <a:chOff x="1294435" y="833378"/>
+            <a:chExt cx="3507129" cy="3507129"/>
+          </a:xfrm>
+        </p:grpSpPr>
+        <p:sp>
+          <p:nvSpPr>
+            <p:cNvPr id="44" name="椭圆 43"/>
+            <p:cNvSpPr/>
+            <p:nvPr/>
+          </p:nvSpPr>
+          <p:spPr>
+            <a:xfrm>
+              <a:off x="1294435" y="833378"/>
+              <a:ext cx="3507129" cy="3507129"/>
+            </a:xfrm>
+            <a:prstGeom prst="ellipse">
+              <a:avLst/>
+            </a:prstGeom>
+            <a:solidFill>
+              <a:schemeClr val="tx1">
+                <a:lumMod val="95000"/>
+                <a:lumOff val="5000"/>
+                <a:alpha val="43000"/>
+              </a:schemeClr>
+            </a:solidFill>
+            <a:ln w="38100">
+              <a:solidFill>
+                <a:schemeClr val="bg1">
+                  <a:lumMod val="85000"/>
+                </a:schemeClr>
+              </a:solidFill>
+            </a:ln>
+          </p:spPr>
+          <p:style>
+            <a:lnRef idx="2">
+              <a:schemeClr val="accent1">
+                <a:shade val="50000"/>
+              </a:schemeClr>
+            </a:lnRef>
+            <a:fillRef idx="1">
+              <a:schemeClr val="accent1"/>
+            </a:fillRef>
+            <a:effectRef idx="0">
+              <a:schemeClr val="accent1"/>
+            </a:effectRef>
+            <a:fontRef idx="minor">
+              <a:schemeClr val="lt1"/>
+            </a:fontRef>
+          </p:style>
+          <p:txBody>
+            <a:bodyPr anchor="ctr"/>
+            <a:lstStyle/>
+            <a:p>
+              <a:pPr marL="0" marR="0" lvl="0" indent="0" algn="ctr" defTabSz="914400" rtl="0" eaLnBrk="1" fontAlgn="auto" latinLnBrk="0" hangingPunct="1">
+                <a:lnSpc>
+                  <a:spcPct val="100000"/>
+                </a:lnSpc>
+                <a:spcBef>
+                  <a:spcPts val="0"/>
+                </a:spcBef>
+                <a:spcAft>
+                  <a:spcPts val="0"/>
+                </a:spcAft>
+                <a:buClrTx/>
+                <a:buSzTx/>
+                <a:buFontTx/>
+                <a:buNone/>
+                <a:defRPr/>
+              </a:pPr>
+              <a:endParaRPr kumimoji="0" lang="zh-CN" altLang="en-US" sz="1800" b="0" i="0" u="none" strike="noStrike" kern="1200" cap="none" spc="0" normalizeH="0" baseline="0" noProof="0" dirty="0">
+                <a:ln>
+                  <a:noFill/>
+                </a:ln>
+                <a:solidFill>
+                  <a:prstClr val="white"/>
+                </a:solidFill>
+                <a:effectLst/>
+                <a:uLnTx/>
+                <a:uFillTx/>
+                <a:latin typeface="Calibri"/>
+                <a:ea typeface="SimSun" pitchFamily="2" charset="-122"/>
+                <a:cs typeface="+mn-cs"/>
+              </a:endParaRPr>
+            </a:p>
+          </p:txBody>
+        </p:sp>
+        <p:sp>
+          <p:nvSpPr>
+            <p:cNvPr id="25605" name="矩形 44"/>
+            <p:cNvSpPr/>
+            <p:nvPr/>
+          </p:nvSpPr>
+          <p:spPr>
+            <a:xfrm>
+              <a:off x="1715425" y="2492037"/>
+              <a:ext cx="2665148" cy="929310"/>
+            </a:xfrm>
+            <a:prstGeom prst="rect">
+              <a:avLst/>
+            </a:prstGeom>
+            <a:noFill/>
+            <a:ln w="9525">
+              <a:noFill/>
+            </a:ln>
+          </p:spPr>
+          <p:txBody>
+            <a:bodyPr anchor="t" anchorCtr="0">
+              <a:spAutoFit/>
+            </a:bodyPr>
+            <a:p>
+              <a:pPr algn="ctr"/>
+              <a:r>
+                <a:rPr lang="en-US" altLang="zh-CN" sz="2800" baseline="-25000" dirty="0">
+                  <a:solidFill>
+                    <a:srgbClr val="FFFFFF"/>
+                  </a:solidFill>
+                  <a:latin typeface="Microsoft YaHei" pitchFamily="34" charset="-122"/>
+                  <a:ea typeface="Microsoft YaHei" pitchFamily="34" charset="-122"/>
+                </a:rPr>
+                <a:t>Visit to their official website, download and install</a:t>
+              </a:r>
+              <a:endParaRPr lang="en-US" altLang="zh-CN" sz="2800" baseline="-25000" dirty="0">
+                <a:solidFill>
+                  <a:srgbClr val="FFFFFF"/>
+                </a:solidFill>
+                <a:latin typeface="Microsoft YaHei" pitchFamily="34" charset="-122"/>
+                <a:ea typeface="Microsoft YaHei" pitchFamily="34" charset="-122"/>
+              </a:endParaRPr>
+            </a:p>
+          </p:txBody>
+        </p:sp>
+        <p:sp>
+          <p:nvSpPr>
+            <p:cNvPr id="25606" name="矩形 45"/>
+            <p:cNvSpPr/>
+            <p:nvPr/>
+          </p:nvSpPr>
+          <p:spPr>
+            <a:xfrm>
+              <a:off x="1932726" y="1630373"/>
+              <a:ext cx="2229387" cy="583358"/>
+            </a:xfrm>
+            <a:prstGeom prst="rect">
+              <a:avLst/>
+            </a:prstGeom>
+            <a:noFill/>
+            <a:ln w="9525">
+              <a:noFill/>
+            </a:ln>
+          </p:spPr>
+          <p:txBody>
+            <a:bodyPr anchor="t" anchorCtr="0">
+              <a:spAutoFit/>
+            </a:bodyPr>
+            <a:p>
+              <a:pPr algn="ctr"/>
+              <a:r>
+                <a:rPr lang="en-US" altLang="zh-CN" sz="3200" b="1" dirty="0">
+                  <a:solidFill>
+                    <a:srgbClr val="FFFFFF"/>
+                  </a:solidFill>
+                  <a:latin typeface="Microsoft YaHei" pitchFamily="34" charset="-122"/>
+                  <a:ea typeface="Microsoft YaHei" pitchFamily="34" charset="-122"/>
+                </a:rPr>
+                <a:t>Web-Site</a:t>
+              </a:r>
+              <a:endParaRPr lang="en-US" altLang="zh-CN" sz="3200" b="1" dirty="0">
+                <a:solidFill>
+                  <a:srgbClr val="FFFFFF"/>
+                </a:solidFill>
+                <a:latin typeface="Microsoft YaHei" pitchFamily="34" charset="-122"/>
+                <a:ea typeface="Microsoft YaHei" pitchFamily="34" charset="-122"/>
+              </a:endParaRPr>
+            </a:p>
+          </p:txBody>
+        </p:sp>
+      </p:grpSp>
+      <p:pic>
+        <p:nvPicPr>
+          <p:cNvPr id="2" name="Picture 1" descr="Screenshot 2025-10-17 at 1.11.05 PM"/>
+          <p:cNvPicPr>
+            <a:picLocks noChangeAspect="1"/>
+          </p:cNvPicPr>
+          <p:nvPr/>
+        </p:nvPicPr>
+        <p:blipFill>
+          <a:blip r:embed="rId1"/>
+          <a:stretch>
+            <a:fillRect/>
+          </a:stretch>
+        </p:blipFill>
+        <p:spPr>
+          <a:xfrm>
+            <a:off x="3167380" y="365760"/>
+            <a:ext cx="8918575" cy="6126480"/>
+          </a:xfrm>
+          <a:prstGeom prst="rect">
+            <a:avLst/>
+          </a:prstGeom>
+          <a:ln>
+            <a:solidFill>
+              <a:schemeClr val="bg2">
+                <a:lumMod val="10000"/>
+              </a:schemeClr>
+            </a:solidFill>
+          </a:ln>
+        </p:spPr>
+      </p:pic>
+    </p:spTree>
+  </p:cSld>
+  <p:clrMapOvr>
+    <a:masterClrMapping/>
+  </p:clrMapOvr>
+</p:sld>
+</file>
+
+<file path=ppt/slides/slide13.xml><?xml version="1.0" encoding="utf-8"?>
+<p:sld xmlns:a="http://schemas.openxmlformats.org/drawingml/2006/main" xmlns:r="http://schemas.openxmlformats.org/officeDocument/2006/relationships" xmlns:p="http://schemas.openxmlformats.org/presentationml/2006/main">
+  <p:cSld>
+    <p:spTree>
+      <p:nvGrpSpPr>
+        <p:cNvPr id="1" name=""/>
+        <p:cNvGrpSpPr/>
+        <p:nvPr/>
+      </p:nvGrpSpPr>
+      <p:grpSpPr/>
+      <p:grpSp>
+        <p:nvGrpSpPr>
+          <p:cNvPr id="25603" name="组合 42"/>
+          <p:cNvGrpSpPr/>
+          <p:nvPr/>
+        </p:nvGrpSpPr>
+        <p:grpSpPr>
+          <a:xfrm>
+            <a:off x="8597583" y="101283"/>
+            <a:ext cx="3506787" cy="3508375"/>
+            <a:chOff x="1294435" y="833378"/>
+            <a:chExt cx="3507129" cy="3507129"/>
+          </a:xfrm>
+        </p:grpSpPr>
+        <p:sp>
+          <p:nvSpPr>
+            <p:cNvPr id="44" name="椭圆 43"/>
+            <p:cNvSpPr/>
+            <p:nvPr/>
+          </p:nvSpPr>
+          <p:spPr>
+            <a:xfrm>
+              <a:off x="1294435" y="833378"/>
+              <a:ext cx="3507129" cy="3507129"/>
+            </a:xfrm>
+            <a:prstGeom prst="ellipse">
+              <a:avLst/>
+            </a:prstGeom>
+            <a:solidFill>
+              <a:schemeClr val="tx1">
+                <a:lumMod val="95000"/>
+                <a:lumOff val="5000"/>
+                <a:alpha val="43000"/>
+              </a:schemeClr>
+            </a:solidFill>
+            <a:ln w="38100">
+              <a:solidFill>
+                <a:schemeClr val="bg1">
+                  <a:lumMod val="85000"/>
+                </a:schemeClr>
+              </a:solidFill>
+            </a:ln>
+          </p:spPr>
+          <p:style>
+            <a:lnRef idx="2">
+              <a:schemeClr val="accent1">
+                <a:shade val="50000"/>
+              </a:schemeClr>
+            </a:lnRef>
+            <a:fillRef idx="1">
+              <a:schemeClr val="accent1"/>
+            </a:fillRef>
+            <a:effectRef idx="0">
+              <a:schemeClr val="accent1"/>
+            </a:effectRef>
+            <a:fontRef idx="minor">
+              <a:schemeClr val="lt1"/>
+            </a:fontRef>
+          </p:style>
+          <p:txBody>
+            <a:bodyPr anchor="ctr"/>
+            <a:lstStyle/>
+            <a:p>
+              <a:pPr marL="0" marR="0" lvl="0" indent="0" algn="ctr" defTabSz="914400" rtl="0" eaLnBrk="1" fontAlgn="auto" latinLnBrk="0" hangingPunct="1">
+                <a:lnSpc>
+                  <a:spcPct val="100000"/>
+                </a:lnSpc>
+                <a:spcBef>
+                  <a:spcPts val="0"/>
+                </a:spcBef>
+                <a:spcAft>
+                  <a:spcPts val="0"/>
+                </a:spcAft>
+                <a:buClrTx/>
+                <a:buSzTx/>
+                <a:buFontTx/>
+                <a:buNone/>
+                <a:defRPr/>
+              </a:pPr>
+              <a:endParaRPr kumimoji="0" lang="zh-CN" altLang="en-US" sz="1800" b="0" i="0" u="none" strike="noStrike" kern="1200" cap="none" spc="0" normalizeH="0" baseline="0" noProof="0" dirty="0">
+                <a:ln>
+                  <a:noFill/>
+                </a:ln>
+                <a:solidFill>
+                  <a:prstClr val="white"/>
+                </a:solidFill>
+                <a:effectLst/>
+                <a:uLnTx/>
+                <a:uFillTx/>
+                <a:latin typeface="Calibri"/>
+                <a:ea typeface="SimSun" pitchFamily="2" charset="-122"/>
+                <a:cs typeface="+mn-cs"/>
+              </a:endParaRPr>
+            </a:p>
+          </p:txBody>
+        </p:sp>
+        <p:sp>
+          <p:nvSpPr>
+            <p:cNvPr id="25605" name="矩形 44"/>
+            <p:cNvSpPr/>
+            <p:nvPr/>
+          </p:nvSpPr>
+          <p:spPr>
+            <a:xfrm>
+              <a:off x="1715425" y="2492037"/>
+              <a:ext cx="2665148" cy="929310"/>
+            </a:xfrm>
+            <a:prstGeom prst="rect">
+              <a:avLst/>
+            </a:prstGeom>
+            <a:noFill/>
+            <a:ln w="9525">
+              <a:noFill/>
+            </a:ln>
+          </p:spPr>
+          <p:txBody>
+            <a:bodyPr anchor="t" anchorCtr="0">
+              <a:spAutoFit/>
+            </a:bodyPr>
+            <a:p>
+              <a:pPr algn="ctr"/>
+              <a:r>
+                <a:rPr lang="en-US" altLang="zh-CN" sz="2800" baseline="-25000" dirty="0">
+                  <a:solidFill>
+                    <a:srgbClr val="FFFFFF"/>
+                  </a:solidFill>
+                  <a:latin typeface="Microsoft YaHei" pitchFamily="34" charset="-122"/>
+                  <a:ea typeface="Microsoft YaHei" pitchFamily="34" charset="-122"/>
+                </a:rPr>
+                <a:t>Start the InteliJ IDEA, open the app and run it</a:t>
+              </a:r>
+              <a:endParaRPr lang="en-US" altLang="zh-CN" sz="2800" baseline="-25000" dirty="0">
+                <a:solidFill>
+                  <a:srgbClr val="FFFFFF"/>
+                </a:solidFill>
+                <a:latin typeface="Microsoft YaHei" pitchFamily="34" charset="-122"/>
+                <a:ea typeface="Microsoft YaHei" pitchFamily="34" charset="-122"/>
+              </a:endParaRPr>
+            </a:p>
+          </p:txBody>
+        </p:sp>
+        <p:sp>
+          <p:nvSpPr>
+            <p:cNvPr id="25606" name="矩形 45"/>
+            <p:cNvSpPr/>
+            <p:nvPr/>
+          </p:nvSpPr>
+          <p:spPr>
+            <a:xfrm>
+              <a:off x="1823442" y="1630655"/>
+              <a:ext cx="2447529" cy="583358"/>
+            </a:xfrm>
+            <a:prstGeom prst="rect">
+              <a:avLst/>
+            </a:prstGeom>
+            <a:noFill/>
+            <a:ln w="9525">
+              <a:noFill/>
+            </a:ln>
+          </p:spPr>
+          <p:txBody>
+            <a:bodyPr wrap="square" anchor="t" anchorCtr="0">
+              <a:spAutoFit/>
+            </a:bodyPr>
+            <a:p>
+              <a:pPr algn="ctr"/>
+              <a:r>
+                <a:rPr lang="en-US" altLang="zh-CN" sz="3200" b="1" dirty="0">
+                  <a:solidFill>
+                    <a:srgbClr val="FFFFFF"/>
+                  </a:solidFill>
+                  <a:latin typeface="Microsoft YaHei" pitchFamily="34" charset="-122"/>
+                  <a:ea typeface="Microsoft YaHei" pitchFamily="34" charset="-122"/>
+                </a:rPr>
+                <a:t>Usage</a:t>
+              </a:r>
+              <a:endParaRPr lang="en-US" altLang="zh-CN" sz="3200" b="1" dirty="0">
+                <a:solidFill>
+                  <a:srgbClr val="FFFFFF"/>
+                </a:solidFill>
+                <a:latin typeface="Microsoft YaHei" pitchFamily="34" charset="-122"/>
+                <a:ea typeface="Microsoft YaHei" pitchFamily="34" charset="-122"/>
+              </a:endParaRPr>
+            </a:p>
+          </p:txBody>
+        </p:sp>
+      </p:grpSp>
+      <p:pic>
+        <p:nvPicPr>
+          <p:cNvPr id="2" name="Picture 1" descr="Screenshot 2025-10-17 at 12.51.14 PM"/>
+          <p:cNvPicPr>
+            <a:picLocks noChangeAspect="1"/>
+          </p:cNvPicPr>
+          <p:nvPr/>
+        </p:nvPicPr>
+        <p:blipFill>
+          <a:blip r:embed="rId1"/>
+          <a:stretch>
+            <a:fillRect/>
+          </a:stretch>
+        </p:blipFill>
+        <p:spPr>
+          <a:xfrm>
+            <a:off x="172720" y="306705"/>
+            <a:ext cx="8661400" cy="3530600"/>
+          </a:xfrm>
+          <a:prstGeom prst="rect">
+            <a:avLst/>
+          </a:prstGeom>
+        </p:spPr>
+      </p:pic>
+      <p:pic>
+        <p:nvPicPr>
+          <p:cNvPr id="3" name="Picture 2" descr="Screenshot 2025-10-17 at 12.51.27 PM"/>
+          <p:cNvPicPr>
+            <a:picLocks noChangeAspect="1"/>
+          </p:cNvPicPr>
+          <p:nvPr/>
+        </p:nvPicPr>
+        <p:blipFill>
+          <a:blip r:embed="rId2"/>
+          <a:stretch>
+            <a:fillRect/>
+          </a:stretch>
+        </p:blipFill>
+        <p:spPr>
+          <a:xfrm>
+            <a:off x="4799330" y="4106545"/>
+            <a:ext cx="4648200" cy="2311400"/>
+          </a:xfrm>
+          <a:prstGeom prst="rect">
+            <a:avLst/>
+          </a:prstGeom>
+        </p:spPr>
+      </p:pic>
+    </p:spTree>
+  </p:cSld>
+  <p:clrMapOvr>
+    <a:masterClrMapping/>
+  </p:clrMapOvr>
+</p:sld>
+</file>
+
+<file path=ppt/slides/slide14.xml><?xml version="1.0" encoding="utf-8"?>
 <p:sld xmlns:a="http://schemas.openxmlformats.org/drawingml/2006/main" xmlns:r="http://schemas.openxmlformats.org/officeDocument/2006/relationships" xmlns:p="http://schemas.openxmlformats.org/presentationml/2006/main">
   <p:cSld>
     <p:spTree>
@@ -4379,6 +5456,490 @@
           </a:p>
         </p:txBody>
       </p:sp>
+      <p:cxnSp>
+        <p:nvCxnSpPr>
+          <p:cNvPr id="13" name="Straight Arrow Connector 12"/>
+          <p:cNvCxnSpPr>
+            <a:endCxn id="14" idx="1"/>
+          </p:cNvCxnSpPr>
+          <p:nvPr/>
+        </p:nvCxnSpPr>
+        <p:spPr>
+          <a:xfrm>
+            <a:off x="2875915" y="1148715"/>
+            <a:ext cx="1383665" cy="90170"/>
+          </a:xfrm>
+          <a:prstGeom prst="straightConnector1">
+            <a:avLst/>
+          </a:prstGeom>
+          <a:ln>
+            <a:solidFill>
+              <a:srgbClr val="FF0000"/>
+            </a:solidFill>
+            <a:tailEnd type="arrow"/>
+          </a:ln>
+        </p:spPr>
+        <p:style>
+          <a:lnRef idx="2">
+            <a:schemeClr val="accent1"/>
+          </a:lnRef>
+          <a:fillRef idx="0">
+            <a:srgbClr val="FFFFFF"/>
+          </a:fillRef>
+          <a:effectRef idx="0">
+            <a:srgbClr val="FFFFFF"/>
+          </a:effectRef>
+          <a:fontRef idx="minor">
+            <a:schemeClr val="tx1"/>
+          </a:fontRef>
+        </p:style>
+      </p:cxnSp>
+      <p:sp>
+        <p:nvSpPr>
+          <p:cNvPr id="14" name="Rectangles 13"/>
+          <p:cNvSpPr/>
+          <p:nvPr/>
+        </p:nvSpPr>
+        <p:spPr>
+          <a:xfrm>
+            <a:off x="4259580" y="1038225"/>
+            <a:ext cx="3456305" cy="400685"/>
+          </a:xfrm>
+          <a:prstGeom prst="rect">
+            <a:avLst/>
+          </a:prstGeom>
+          <a:noFill/>
+          <a:ln>
+            <a:solidFill>
+              <a:srgbClr val="FF0000"/>
+            </a:solidFill>
+          </a:ln>
+          <a:extLst>
+            <a:ext uri="{909E8E84-426E-40DD-AFC4-6F175D3DCCD1}">
+              <a14:hiddenFill xmlns:a14="http://schemas.microsoft.com/office/drawing/2010/main">
+                <a:solidFill>
+                  <a:schemeClr val="accent1"/>
+                </a:solidFill>
+              </a14:hiddenFill>
+            </a:ext>
+          </a:extLst>
+        </p:spPr>
+        <p:style>
+          <a:lnRef idx="2">
+            <a:schemeClr val="accent1">
+              <a:lumMod val="75000"/>
+            </a:schemeClr>
+          </a:lnRef>
+          <a:fillRef idx="1">
+            <a:schemeClr val="accent1"/>
+          </a:fillRef>
+          <a:effectRef idx="0">
+            <a:srgbClr val="FFFFFF"/>
+          </a:effectRef>
+          <a:fontRef idx="minor">
+            <a:schemeClr val="lt1"/>
+          </a:fontRef>
+        </p:style>
+        <p:txBody>
+          <a:bodyPr rtlCol="0" anchor="ctr"/>
+          <a:p>
+            <a:pPr algn="ctr"/>
+            <a:endParaRPr lang="en-US"/>
+          </a:p>
+        </p:txBody>
+      </p:sp>
+      <p:sp>
+        <p:nvSpPr>
+          <p:cNvPr id="15" name="Rectangles 14"/>
+          <p:cNvSpPr/>
+          <p:nvPr/>
+        </p:nvSpPr>
+        <p:spPr>
+          <a:xfrm>
+            <a:off x="4259580" y="1612900"/>
+            <a:ext cx="6142355" cy="873760"/>
+          </a:xfrm>
+          <a:prstGeom prst="rect">
+            <a:avLst/>
+          </a:prstGeom>
+          <a:noFill/>
+          <a:ln>
+            <a:solidFill>
+              <a:srgbClr val="FF0000"/>
+            </a:solidFill>
+          </a:ln>
+          <a:extLst>
+            <a:ext uri="{909E8E84-426E-40DD-AFC4-6F175D3DCCD1}">
+              <a14:hiddenFill xmlns:a14="http://schemas.microsoft.com/office/drawing/2010/main">
+                <a:solidFill>
+                  <a:schemeClr val="accent1"/>
+                </a:solidFill>
+              </a14:hiddenFill>
+            </a:ext>
+          </a:extLst>
+        </p:spPr>
+        <p:style>
+          <a:lnRef idx="2">
+            <a:schemeClr val="accent1">
+              <a:lumMod val="75000"/>
+            </a:schemeClr>
+          </a:lnRef>
+          <a:fillRef idx="1">
+            <a:schemeClr val="accent1"/>
+          </a:fillRef>
+          <a:effectRef idx="0">
+            <a:srgbClr val="FFFFFF"/>
+          </a:effectRef>
+          <a:fontRef idx="minor">
+            <a:schemeClr val="lt1"/>
+          </a:fontRef>
+        </p:style>
+        <p:txBody>
+          <a:bodyPr rtlCol="0" anchor="ctr"/>
+          <a:p>
+            <a:pPr algn="ctr"/>
+            <a:endParaRPr lang="en-US"/>
+          </a:p>
+        </p:txBody>
+      </p:sp>
+      <p:cxnSp>
+        <p:nvCxnSpPr>
+          <p:cNvPr id="16" name="Straight Arrow Connector 15"/>
+          <p:cNvCxnSpPr>
+            <a:endCxn id="15" idx="1"/>
+          </p:cNvCxnSpPr>
+          <p:nvPr/>
+        </p:nvCxnSpPr>
+        <p:spPr>
+          <a:xfrm flipV="1">
+            <a:off x="2527935" y="2049780"/>
+            <a:ext cx="1731645" cy="165100"/>
+          </a:xfrm>
+          <a:prstGeom prst="straightConnector1">
+            <a:avLst/>
+          </a:prstGeom>
+          <a:ln>
+            <a:solidFill>
+              <a:srgbClr val="FF0000"/>
+            </a:solidFill>
+            <a:tailEnd type="arrow"/>
+          </a:ln>
+        </p:spPr>
+        <p:style>
+          <a:lnRef idx="2">
+            <a:schemeClr val="accent1"/>
+          </a:lnRef>
+          <a:fillRef idx="0">
+            <a:srgbClr val="FFFFFF"/>
+          </a:fillRef>
+          <a:effectRef idx="0">
+            <a:srgbClr val="FFFFFF"/>
+          </a:effectRef>
+          <a:fontRef idx="minor">
+            <a:schemeClr val="tx1"/>
+          </a:fontRef>
+        </p:style>
+      </p:cxnSp>
+      <p:sp>
+        <p:nvSpPr>
+          <p:cNvPr id="17" name="Rectangles 16"/>
+          <p:cNvSpPr/>
+          <p:nvPr/>
+        </p:nvSpPr>
+        <p:spPr>
+          <a:xfrm>
+            <a:off x="4259580" y="3215640"/>
+            <a:ext cx="6828155" cy="321945"/>
+          </a:xfrm>
+          <a:prstGeom prst="rect">
+            <a:avLst/>
+          </a:prstGeom>
+          <a:noFill/>
+          <a:ln>
+            <a:solidFill>
+              <a:srgbClr val="FF0000"/>
+            </a:solidFill>
+          </a:ln>
+          <a:extLst>
+            <a:ext uri="{909E8E84-426E-40DD-AFC4-6F175D3DCCD1}">
+              <a14:hiddenFill xmlns:a14="http://schemas.microsoft.com/office/drawing/2010/main">
+                <a:solidFill>
+                  <a:schemeClr val="accent1"/>
+                </a:solidFill>
+              </a14:hiddenFill>
+            </a:ext>
+          </a:extLst>
+        </p:spPr>
+        <p:style>
+          <a:lnRef idx="2">
+            <a:schemeClr val="accent1">
+              <a:lumMod val="75000"/>
+            </a:schemeClr>
+          </a:lnRef>
+          <a:fillRef idx="1">
+            <a:schemeClr val="accent1"/>
+          </a:fillRef>
+          <a:effectRef idx="0">
+            <a:srgbClr val="FFFFFF"/>
+          </a:effectRef>
+          <a:fontRef idx="minor">
+            <a:schemeClr val="lt1"/>
+          </a:fontRef>
+        </p:style>
+        <p:txBody>
+          <a:bodyPr rtlCol="0" anchor="ctr"/>
+          <a:p>
+            <a:pPr algn="ctr"/>
+            <a:endParaRPr lang="en-US"/>
+          </a:p>
+        </p:txBody>
+      </p:sp>
+      <p:cxnSp>
+        <p:nvCxnSpPr>
+          <p:cNvPr id="18" name="Straight Arrow Connector 17"/>
+          <p:cNvCxnSpPr>
+            <a:endCxn id="17" idx="1"/>
+          </p:cNvCxnSpPr>
+          <p:nvPr/>
+        </p:nvCxnSpPr>
+        <p:spPr>
+          <a:xfrm flipV="1">
+            <a:off x="2804795" y="3376930"/>
+            <a:ext cx="1454785" cy="104775"/>
+          </a:xfrm>
+          <a:prstGeom prst="straightConnector1">
+            <a:avLst/>
+          </a:prstGeom>
+          <a:ln>
+            <a:solidFill>
+              <a:srgbClr val="FF0000"/>
+            </a:solidFill>
+            <a:tailEnd type="arrow"/>
+          </a:ln>
+        </p:spPr>
+        <p:style>
+          <a:lnRef idx="2">
+            <a:schemeClr val="accent1"/>
+          </a:lnRef>
+          <a:fillRef idx="0">
+            <a:srgbClr val="FFFFFF"/>
+          </a:fillRef>
+          <a:effectRef idx="0">
+            <a:srgbClr val="FFFFFF"/>
+          </a:effectRef>
+          <a:fontRef idx="minor">
+            <a:schemeClr val="tx1"/>
+          </a:fontRef>
+        </p:style>
+      </p:cxnSp>
+      <p:sp>
+        <p:nvSpPr>
+          <p:cNvPr id="19" name="Rectangles 18"/>
+          <p:cNvSpPr/>
+          <p:nvPr/>
+        </p:nvSpPr>
+        <p:spPr>
+          <a:xfrm>
+            <a:off x="4762500" y="3740150"/>
+            <a:ext cx="7012305" cy="544195"/>
+          </a:xfrm>
+          <a:prstGeom prst="rect">
+            <a:avLst/>
+          </a:prstGeom>
+          <a:noFill/>
+          <a:ln>
+            <a:solidFill>
+              <a:srgbClr val="FF0000"/>
+            </a:solidFill>
+          </a:ln>
+          <a:extLst>
+            <a:ext uri="{909E8E84-426E-40DD-AFC4-6F175D3DCCD1}">
+              <a14:hiddenFill xmlns:a14="http://schemas.microsoft.com/office/drawing/2010/main">
+                <a:solidFill>
+                  <a:schemeClr val="accent1"/>
+                </a:solidFill>
+              </a14:hiddenFill>
+            </a:ext>
+          </a:extLst>
+        </p:spPr>
+        <p:style>
+          <a:lnRef idx="2">
+            <a:schemeClr val="accent1">
+              <a:lumMod val="75000"/>
+            </a:schemeClr>
+          </a:lnRef>
+          <a:fillRef idx="1">
+            <a:schemeClr val="accent1"/>
+          </a:fillRef>
+          <a:effectRef idx="0">
+            <a:srgbClr val="FFFFFF"/>
+          </a:effectRef>
+          <a:fontRef idx="minor">
+            <a:schemeClr val="lt1"/>
+          </a:fontRef>
+        </p:style>
+        <p:txBody>
+          <a:bodyPr rtlCol="0" anchor="ctr"/>
+          <a:p>
+            <a:pPr algn="ctr"/>
+            <a:endParaRPr lang="en-US"/>
+          </a:p>
+        </p:txBody>
+      </p:sp>
+      <p:cxnSp>
+        <p:nvCxnSpPr>
+          <p:cNvPr id="20" name="Straight Arrow Connector 19"/>
+          <p:cNvCxnSpPr>
+            <a:endCxn id="19" idx="1"/>
+          </p:cNvCxnSpPr>
+          <p:nvPr/>
+        </p:nvCxnSpPr>
+        <p:spPr>
+          <a:xfrm flipV="1">
+            <a:off x="3369945" y="4012565"/>
+            <a:ext cx="1392555" cy="306705"/>
+          </a:xfrm>
+          <a:prstGeom prst="straightConnector1">
+            <a:avLst/>
+          </a:prstGeom>
+          <a:ln>
+            <a:solidFill>
+              <a:srgbClr val="FF0000"/>
+            </a:solidFill>
+            <a:tailEnd type="arrow"/>
+          </a:ln>
+        </p:spPr>
+        <p:style>
+          <a:lnRef idx="2">
+            <a:schemeClr val="accent1"/>
+          </a:lnRef>
+          <a:fillRef idx="0">
+            <a:srgbClr val="FFFFFF"/>
+          </a:fillRef>
+          <a:effectRef idx="0">
+            <a:srgbClr val="FFFFFF"/>
+          </a:effectRef>
+          <a:fontRef idx="minor">
+            <a:schemeClr val="tx1"/>
+          </a:fontRef>
+        </p:style>
+      </p:cxnSp>
+      <p:sp>
+        <p:nvSpPr>
+          <p:cNvPr id="21" name="Rectangles 20"/>
+          <p:cNvSpPr/>
+          <p:nvPr/>
+        </p:nvSpPr>
+        <p:spPr>
+          <a:xfrm>
+            <a:off x="4763135" y="5069840"/>
+            <a:ext cx="2683510" cy="252095"/>
+          </a:xfrm>
+          <a:prstGeom prst="rect">
+            <a:avLst/>
+          </a:prstGeom>
+          <a:noFill/>
+          <a:ln>
+            <a:solidFill>
+              <a:srgbClr val="FF0000"/>
+            </a:solidFill>
+          </a:ln>
+          <a:extLst>
+            <a:ext uri="{909E8E84-426E-40DD-AFC4-6F175D3DCCD1}">
+              <a14:hiddenFill xmlns:a14="http://schemas.microsoft.com/office/drawing/2010/main">
+                <a:solidFill>
+                  <a:schemeClr val="accent1"/>
+                </a:solidFill>
+              </a14:hiddenFill>
+            </a:ext>
+          </a:extLst>
+        </p:spPr>
+        <p:style>
+          <a:lnRef idx="2">
+            <a:schemeClr val="accent1">
+              <a:lumMod val="75000"/>
+            </a:schemeClr>
+          </a:lnRef>
+          <a:fillRef idx="1">
+            <a:schemeClr val="accent1"/>
+          </a:fillRef>
+          <a:effectRef idx="0">
+            <a:srgbClr val="FFFFFF"/>
+          </a:effectRef>
+          <a:fontRef idx="minor">
+            <a:schemeClr val="lt1"/>
+          </a:fontRef>
+        </p:style>
+        <p:txBody>
+          <a:bodyPr rtlCol="0" anchor="ctr"/>
+          <a:p>
+            <a:pPr algn="ctr"/>
+            <a:endParaRPr lang="en-US"/>
+          </a:p>
+        </p:txBody>
+      </p:sp>
+      <p:cxnSp>
+        <p:nvCxnSpPr>
+          <p:cNvPr id="22" name="Straight Arrow Connector 21"/>
+          <p:cNvCxnSpPr>
+            <a:endCxn id="21" idx="1"/>
+          </p:cNvCxnSpPr>
+          <p:nvPr/>
+        </p:nvCxnSpPr>
+        <p:spPr>
+          <a:xfrm flipV="1">
+            <a:off x="3243580" y="5196205"/>
+            <a:ext cx="1519555" cy="393065"/>
+          </a:xfrm>
+          <a:prstGeom prst="straightConnector1">
+            <a:avLst/>
+          </a:prstGeom>
+          <a:ln>
+            <a:solidFill>
+              <a:srgbClr val="FF0000"/>
+            </a:solidFill>
+            <a:tailEnd type="arrow"/>
+          </a:ln>
+        </p:spPr>
+        <p:style>
+          <a:lnRef idx="2">
+            <a:schemeClr val="accent1"/>
+          </a:lnRef>
+          <a:fillRef idx="0">
+            <a:srgbClr val="FFFFFF"/>
+          </a:fillRef>
+          <a:effectRef idx="0">
+            <a:srgbClr val="FFFFFF"/>
+          </a:effectRef>
+          <a:fontRef idx="minor">
+            <a:schemeClr val="tx1"/>
+          </a:fontRef>
+        </p:style>
+      </p:cxnSp>
+      <p:pic>
+        <p:nvPicPr>
+          <p:cNvPr id="23" name="Picture 22" descr="Screenshot 2025-10-17 at 1.17.42 PM"/>
+          <p:cNvPicPr>
+            <a:picLocks noChangeAspect="1"/>
+          </p:cNvPicPr>
+          <p:nvPr/>
+        </p:nvPicPr>
+        <p:blipFill>
+          <a:blip r:embed="rId2"/>
+          <a:stretch>
+            <a:fillRect/>
+          </a:stretch>
+        </p:blipFill>
+        <p:spPr>
+          <a:xfrm>
+            <a:off x="7596505" y="5652770"/>
+            <a:ext cx="4216400" cy="533400"/>
+          </a:xfrm>
+          <a:prstGeom prst="rect">
+            <a:avLst/>
+          </a:prstGeom>
+        </p:spPr>
+      </p:pic>
     </p:spTree>
   </p:cSld>
   <p:clrMapOvr>
@@ -4387,7 +5948,7 @@
 </p:sld>
 </file>
 
-<file path=ppt/slides/slide11.xml><?xml version="1.0" encoding="utf-8"?>
+<file path=ppt/slides/slide15.xml><?xml version="1.0" encoding="utf-8"?>
 <p:sld xmlns:a="http://schemas.openxmlformats.org/drawingml/2006/main" xmlns:r="http://schemas.openxmlformats.org/officeDocument/2006/relationships" xmlns:p="http://schemas.openxmlformats.org/presentationml/2006/main">
   <p:cSld>
     <p:spTree>
@@ -5868,269 +7429,7 @@
 </p:sld>
 </file>
 
-<file path=ppt/slides/slide12.xml><?xml version="1.0" encoding="utf-8"?>
-<p:sld xmlns:a="http://schemas.openxmlformats.org/drawingml/2006/main" xmlns:r="http://schemas.openxmlformats.org/officeDocument/2006/relationships" xmlns:p="http://schemas.openxmlformats.org/presentationml/2006/main">
-  <p:cSld>
-    <p:spTree>
-      <p:nvGrpSpPr>
-        <p:cNvPr id="1" name=""/>
-        <p:cNvGrpSpPr/>
-        <p:nvPr/>
-      </p:nvGrpSpPr>
-      <p:grpSpPr/>
-      <p:pic>
-        <p:nvPicPr>
-          <p:cNvPr id="25601" name="图片 35"/>
-          <p:cNvPicPr>
-            <a:picLocks noChangeAspect="1"/>
-          </p:cNvPicPr>
-          <p:nvPr/>
-        </p:nvPicPr>
-        <p:blipFill>
-          <a:blip r:embed="rId1"/>
-          <a:stretch>
-            <a:fillRect/>
-          </a:stretch>
-        </p:blipFill>
-        <p:spPr>
-          <a:xfrm>
-            <a:off x="8123238" y="949325"/>
-            <a:ext cx="4068762" cy="2457450"/>
-          </a:xfrm>
-          <a:prstGeom prst="rect">
-            <a:avLst/>
-          </a:prstGeom>
-          <a:noFill/>
-          <a:ln w="9525">
-            <a:noFill/>
-          </a:ln>
-        </p:spPr>
-      </p:pic>
-      <p:pic>
-        <p:nvPicPr>
-          <p:cNvPr id="25602" name="图片 36"/>
-          <p:cNvPicPr>
-            <a:picLocks noChangeAspect="1"/>
-          </p:cNvPicPr>
-          <p:nvPr/>
-        </p:nvPicPr>
-        <p:blipFill>
-          <a:blip r:embed="rId2"/>
-          <a:srcRect t="10657"/>
-          <a:stretch>
-            <a:fillRect/>
-          </a:stretch>
-        </p:blipFill>
-        <p:spPr>
-          <a:xfrm>
-            <a:off x="0" y="0"/>
-            <a:ext cx="12192000" cy="6858000"/>
-          </a:xfrm>
-          <a:prstGeom prst="rect">
-            <a:avLst/>
-          </a:prstGeom>
-          <a:noFill/>
-          <a:ln w="9525">
-            <a:noFill/>
-          </a:ln>
-        </p:spPr>
-      </p:pic>
-      <p:grpSp>
-        <p:nvGrpSpPr>
-          <p:cNvPr id="25603" name="组合 42"/>
-          <p:cNvGrpSpPr/>
-          <p:nvPr/>
-        </p:nvGrpSpPr>
-        <p:grpSpPr>
-          <a:xfrm>
-            <a:off x="1443038" y="1652588"/>
-            <a:ext cx="3506787" cy="3508375"/>
-            <a:chOff x="1294435" y="833378"/>
-            <a:chExt cx="3507129" cy="3507129"/>
-          </a:xfrm>
-        </p:grpSpPr>
-        <p:sp>
-          <p:nvSpPr>
-            <p:cNvPr id="44" name="椭圆 43"/>
-            <p:cNvSpPr/>
-            <p:nvPr/>
-          </p:nvSpPr>
-          <p:spPr>
-            <a:xfrm>
-              <a:off x="1294435" y="833378"/>
-              <a:ext cx="3507129" cy="3507129"/>
-            </a:xfrm>
-            <a:prstGeom prst="ellipse">
-              <a:avLst/>
-            </a:prstGeom>
-            <a:solidFill>
-              <a:schemeClr val="tx1">
-                <a:lumMod val="95000"/>
-                <a:lumOff val="5000"/>
-                <a:alpha val="43000"/>
-              </a:schemeClr>
-            </a:solidFill>
-            <a:ln w="38100">
-              <a:solidFill>
-                <a:schemeClr val="bg1">
-                  <a:lumMod val="85000"/>
-                </a:schemeClr>
-              </a:solidFill>
-            </a:ln>
-          </p:spPr>
-          <p:style>
-            <a:lnRef idx="2">
-              <a:schemeClr val="accent1">
-                <a:shade val="50000"/>
-              </a:schemeClr>
-            </a:lnRef>
-            <a:fillRef idx="1">
-              <a:schemeClr val="accent1"/>
-            </a:fillRef>
-            <a:effectRef idx="0">
-              <a:schemeClr val="accent1"/>
-            </a:effectRef>
-            <a:fontRef idx="minor">
-              <a:schemeClr val="lt1"/>
-            </a:fontRef>
-          </p:style>
-          <p:txBody>
-            <a:bodyPr anchor="ctr"/>
-            <a:lstStyle/>
-            <a:p>
-              <a:pPr marL="0" marR="0" lvl="0" indent="0" algn="ctr" defTabSz="914400" rtl="0" eaLnBrk="1" fontAlgn="auto" latinLnBrk="0" hangingPunct="1">
-                <a:lnSpc>
-                  <a:spcPct val="100000"/>
-                </a:lnSpc>
-                <a:spcBef>
-                  <a:spcPts val="0"/>
-                </a:spcBef>
-                <a:spcAft>
-                  <a:spcPts val="0"/>
-                </a:spcAft>
-                <a:buClrTx/>
-                <a:buSzTx/>
-                <a:buFontTx/>
-                <a:buNone/>
-                <a:defRPr/>
-              </a:pPr>
-              <a:endParaRPr kumimoji="0" lang="zh-CN" altLang="en-US" sz="1800" b="0" i="0" u="none" strike="noStrike" kern="1200" cap="none" spc="0" normalizeH="0" baseline="0" noProof="0" dirty="0">
-                <a:ln>
-                  <a:noFill/>
-                </a:ln>
-                <a:solidFill>
-                  <a:prstClr val="white"/>
-                </a:solidFill>
-                <a:effectLst/>
-                <a:uLnTx/>
-                <a:uFillTx/>
-                <a:latin typeface="Calibri"/>
-                <a:ea typeface="SimSun" pitchFamily="2" charset="-122"/>
-                <a:cs typeface="+mn-cs"/>
-              </a:endParaRPr>
-            </a:p>
-          </p:txBody>
-        </p:sp>
-        <p:sp>
-          <p:nvSpPr>
-            <p:cNvPr id="25605" name="矩形 44"/>
-            <p:cNvSpPr/>
-            <p:nvPr/>
-          </p:nvSpPr>
-          <p:spPr>
-            <a:xfrm>
-              <a:off x="1715425" y="2492037"/>
-              <a:ext cx="2665148" cy="736973"/>
-            </a:xfrm>
-            <a:prstGeom prst="rect">
-              <a:avLst/>
-            </a:prstGeom>
-            <a:noFill/>
-            <a:ln w="9525">
-              <a:noFill/>
-            </a:ln>
-          </p:spPr>
-          <p:txBody>
-            <a:bodyPr anchor="t" anchorCtr="0">
-              <a:spAutoFit/>
-            </a:bodyPr>
-            <a:p>
-              <a:pPr algn="ctr"/>
-              <a:r>
-                <a:rPr lang="zh-CN" altLang="en-US" sz="1400" dirty="0">
-                  <a:solidFill>
-                    <a:srgbClr val="FFFFFF"/>
-                  </a:solidFill>
-                  <a:latin typeface="Microsoft YaHei" pitchFamily="34" charset="-122"/>
-                  <a:ea typeface="Microsoft YaHei" pitchFamily="34" charset="-122"/>
-                </a:rPr>
-                <a:t>Add your words here, according to your need to draw the text box size</a:t>
-              </a:r>
-              <a:endParaRPr lang="zh-CN" altLang="en-US" sz="1400" dirty="0">
-                <a:solidFill>
-                  <a:srgbClr val="FFFFFF"/>
-                </a:solidFill>
-                <a:latin typeface="Microsoft YaHei" pitchFamily="34" charset="-122"/>
-                <a:ea typeface="Microsoft YaHei" pitchFamily="34" charset="-122"/>
-              </a:endParaRPr>
-            </a:p>
-          </p:txBody>
-        </p:sp>
-        <p:sp>
-          <p:nvSpPr>
-            <p:cNvPr id="25606" name="矩形 45"/>
-            <p:cNvSpPr/>
-            <p:nvPr/>
-          </p:nvSpPr>
-          <p:spPr>
-            <a:xfrm>
-              <a:off x="1933361" y="1920465"/>
-              <a:ext cx="2229387" cy="460211"/>
-            </a:xfrm>
-            <a:prstGeom prst="rect">
-              <a:avLst/>
-            </a:prstGeom>
-            <a:noFill/>
-            <a:ln w="9525">
-              <a:noFill/>
-            </a:ln>
-          </p:spPr>
-          <p:txBody>
-            <a:bodyPr anchor="t" anchorCtr="0">
-              <a:spAutoFit/>
-            </a:bodyPr>
-            <a:p>
-              <a:pPr algn="ctr"/>
-              <a:r>
-                <a:rPr lang="zh-CN" altLang="en-US" sz="2400" b="1" dirty="0">
-                  <a:solidFill>
-                    <a:srgbClr val="FFFFFF"/>
-                  </a:solidFill>
-                  <a:latin typeface="Microsoft YaHei" pitchFamily="34" charset="-122"/>
-                  <a:ea typeface="Microsoft YaHei" pitchFamily="34" charset="-122"/>
-                </a:rPr>
-                <a:t>Add title</a:t>
-              </a:r>
-              <a:endParaRPr lang="zh-CN" altLang="en-US" sz="2400" b="1" dirty="0">
-                <a:solidFill>
-                  <a:srgbClr val="FFFFFF"/>
-                </a:solidFill>
-                <a:latin typeface="Microsoft YaHei" pitchFamily="34" charset="-122"/>
-                <a:ea typeface="Microsoft YaHei" pitchFamily="34" charset="-122"/>
-              </a:endParaRPr>
-            </a:p>
-          </p:txBody>
-        </p:sp>
-      </p:grpSp>
-    </p:spTree>
-  </p:cSld>
-  <p:clrMapOvr>
-    <a:masterClrMapping/>
-  </p:clrMapOvr>
-</p:sld>
-</file>
-
-<file path=ppt/slides/slide13.xml><?xml version="1.0" encoding="utf-8"?>
+<file path=ppt/slides/slide16.xml><?xml version="1.0" encoding="utf-8"?>
 <p:sld xmlns:a="http://schemas.openxmlformats.org/drawingml/2006/main" xmlns:r="http://schemas.openxmlformats.org/officeDocument/2006/relationships" xmlns:p="http://schemas.openxmlformats.org/presentationml/2006/main">
   <p:cSld>
     <p:bg>
@@ -6157,7 +7456,7 @@
         <p:spPr>
           <a:xfrm>
             <a:off x="1223963" y="2473325"/>
-            <a:ext cx="6035675" cy="1200150"/>
+            <a:ext cx="6035675" cy="1198880"/>
           </a:xfrm>
           <a:prstGeom prst="rect">
             <a:avLst/>
@@ -6180,54 +7479,9 @@
                 <a:latin typeface="Microsoft YaHei" pitchFamily="34" charset="-122"/>
                 <a:ea typeface="Microsoft YaHei" pitchFamily="34" charset="-122"/>
               </a:rPr>
-              <a:t>THANK YOU</a:t>
+              <a:t>THANK YOU!</a:t>
             </a:r>
             <a:endParaRPr lang="zh-CN" altLang="en-US" sz="7200" b="1" dirty="0">
-              <a:solidFill>
-                <a:srgbClr val="FFFFFF"/>
-              </a:solidFill>
-              <a:latin typeface="Microsoft YaHei" pitchFamily="34" charset="-122"/>
-              <a:ea typeface="Microsoft YaHei" pitchFamily="34" charset="-122"/>
-            </a:endParaRPr>
-          </a:p>
-        </p:txBody>
-      </p:sp>
-      <p:sp>
-        <p:nvSpPr>
-          <p:cNvPr id="26627" name="文本框 10"/>
-          <p:cNvSpPr txBox="1"/>
-          <p:nvPr/>
-        </p:nvSpPr>
-        <p:spPr>
-          <a:xfrm>
-            <a:off x="1223963" y="3636963"/>
-            <a:ext cx="5614987" cy="369887"/>
-          </a:xfrm>
-          <a:prstGeom prst="rect">
-            <a:avLst/>
-          </a:prstGeom>
-          <a:noFill/>
-          <a:ln w="9525">
-            <a:noFill/>
-          </a:ln>
-        </p:spPr>
-        <p:txBody>
-          <a:bodyPr anchor="t" anchorCtr="0">
-            <a:spAutoFit/>
-          </a:bodyPr>
-          <a:p>
-            <a:pPr algn="dist"/>
-            <a:r>
-              <a:rPr lang="en-US" altLang="zh-CN" dirty="0">
-                <a:solidFill>
-                  <a:srgbClr val="FFFFFF"/>
-                </a:solidFill>
-                <a:latin typeface="Microsoft YaHei" pitchFamily="34" charset="-122"/>
-                <a:ea typeface="Microsoft YaHei" pitchFamily="34" charset="-122"/>
-              </a:rPr>
-              <a:t>THE PROFESSIONAL POWERPOINT TEMPLATE</a:t>
-            </a:r>
-            <a:endParaRPr lang="zh-CN" altLang="en-US" dirty="0">
               <a:solidFill>
                 <a:srgbClr val="FFFFFF"/>
               </a:solidFill>

--- a/Class_Presentation.pptx
+++ b/Class_Presentation.pptx
@@ -8,7 +8,7 @@
     <p:notesMasterId r:id="rId4"/>
   </p:notesMasterIdLst>
   <p:handoutMasterIdLst>
-    <p:handoutMasterId r:id="rId20"/>
+    <p:handoutMasterId r:id="rId21"/>
   </p:handoutMasterIdLst>
   <p:sldIdLst>
     <p:sldId id="257" r:id="rId3"/>
@@ -26,7 +26,8 @@
     <p:sldId id="296" r:id="rId16"/>
     <p:sldId id="294" r:id="rId17"/>
     <p:sldId id="275" r:id="rId18"/>
-    <p:sldId id="262" r:id="rId19"/>
+    <p:sldId id="298" r:id="rId19"/>
+    <p:sldId id="262" r:id="rId20"/>
   </p:sldIdLst>
   <p:sldSz cx="12192000" cy="6858000"/>
   <p:notesSz cx="6858000" cy="9144000"/>
@@ -1601,7 +1602,7 @@
               <a:rPr lang="en-US" altLang="en-US">
                 <a:sym typeface="+mn-ea"/>
               </a:rPr>
-              <a:t>If you`ve ever tried to build a web application in Java, you know it can be complicated — too many configuration files and setup steps. Spring Boot solves that by making it super simple to start and run applications</a:t>
+              <a:t>If you`ve ever tried to build a web application in Java, you know it can be complicated too many configuration files and setup steps. Spring Boot solves that by making it super simple to start and run applications</a:t>
             </a:r>
             <a:endParaRPr lang="en-US" altLang="en-US"/>
           </a:p>
@@ -7430,6 +7431,319 @@
 </file>
 
 <file path=ppt/slides/slide16.xml><?xml version="1.0" encoding="utf-8"?>
+<p:sld xmlns:a="http://schemas.openxmlformats.org/drawingml/2006/main" xmlns:r="http://schemas.openxmlformats.org/officeDocument/2006/relationships" xmlns:p="http://schemas.openxmlformats.org/presentationml/2006/main">
+  <p:cSld>
+    <p:spTree>
+      <p:nvGrpSpPr>
+        <p:cNvPr id="1" name=""/>
+        <p:cNvGrpSpPr/>
+        <p:nvPr/>
+      </p:nvGrpSpPr>
+      <p:grpSpPr/>
+      <p:sp>
+        <p:nvSpPr>
+          <p:cNvPr id="2" name="Title 1"/>
+          <p:cNvSpPr>
+            <a:spLocks noGrp="1"/>
+          </p:cNvSpPr>
+          <p:nvPr>
+            <p:ph type="title"/>
+          </p:nvPr>
+        </p:nvSpPr>
+        <p:spPr>
+          <a:xfrm>
+            <a:off x="327025" y="0"/>
+            <a:ext cx="4542155" cy="1123950"/>
+          </a:xfrm>
+        </p:spPr>
+        <p:txBody>
+          <a:bodyPr/>
+          <a:p>
+            <a:r>
+              <a:rPr lang="en-US" sz="4000"/>
+              <a:t>Main Differences</a:t>
+            </a:r>
+            <a:endParaRPr lang="en-US" sz="4000"/>
+          </a:p>
+        </p:txBody>
+      </p:sp>
+      <p:sp>
+        <p:nvSpPr>
+          <p:cNvPr id="3" name="Content Placeholder 2"/>
+          <p:cNvSpPr>
+            <a:spLocks noGrp="1"/>
+          </p:cNvSpPr>
+          <p:nvPr>
+            <p:ph idx="1"/>
+          </p:nvPr>
+        </p:nvSpPr>
+        <p:spPr>
+          <a:xfrm>
+            <a:off x="3422650" y="1026795"/>
+            <a:ext cx="1446530" cy="605790"/>
+          </a:xfrm>
+        </p:spPr>
+        <p:txBody>
+          <a:bodyPr/>
+          <a:p>
+            <a:pPr marL="0" indent="0">
+              <a:buNone/>
+            </a:pPr>
+            <a:r>
+              <a:rPr lang="en-US"/>
+              <a:t>Spring</a:t>
+            </a:r>
+            <a:endParaRPr lang="en-US"/>
+          </a:p>
+        </p:txBody>
+      </p:sp>
+      <p:pic>
+        <p:nvPicPr>
+          <p:cNvPr id="4" name="Picture 3" descr="Screenshot 2025-10-17 at 1.28.32 PM"/>
+          <p:cNvPicPr>
+            <a:picLocks noChangeAspect="1"/>
+          </p:cNvPicPr>
+          <p:nvPr/>
+        </p:nvPicPr>
+        <p:blipFill>
+          <a:blip r:embed="rId1"/>
+          <a:stretch>
+            <a:fillRect/>
+          </a:stretch>
+        </p:blipFill>
+        <p:spPr>
+          <a:xfrm>
+            <a:off x="939800" y="1825625"/>
+            <a:ext cx="10312400" cy="4610100"/>
+          </a:xfrm>
+          <a:prstGeom prst="rect">
+            <a:avLst/>
+          </a:prstGeom>
+        </p:spPr>
+      </p:pic>
+      <p:sp>
+        <p:nvSpPr>
+          <p:cNvPr id="5" name="Content Placeholder 2"/>
+          <p:cNvSpPr>
+            <a:spLocks noGrp="1"/>
+          </p:cNvSpPr>
+          <p:nvPr/>
+        </p:nvSpPr>
+        <p:spPr>
+          <a:xfrm>
+            <a:off x="7029450" y="1026795"/>
+            <a:ext cx="3063875" cy="605790"/>
+          </a:xfrm>
+          <a:prstGeom prst="rect">
+            <a:avLst/>
+          </a:prstGeom>
+          <a:noFill/>
+          <a:ln w="9525">
+            <a:noFill/>
+          </a:ln>
+        </p:spPr>
+        <p:txBody>
+          <a:bodyPr anchor="t" anchorCtr="0"/>
+          <a:lstStyle>
+            <a:lvl1pPr marL="228600" indent="-228600" algn="l" rtl="0" fontAlgn="base">
+              <a:lnSpc>
+                <a:spcPct val="90000"/>
+              </a:lnSpc>
+              <a:spcBef>
+                <a:spcPts val="1000"/>
+              </a:spcBef>
+              <a:spcAft>
+                <a:spcPct val="0"/>
+              </a:spcAft>
+              <a:buFont typeface="Arial" panose="020B0604020202090204" pitchFamily="34" charset="0"/>
+              <a:buChar char="•"/>
+              <a:defRPr sz="2800" kern="1200">
+                <a:solidFill>
+                  <a:schemeClr val="tx1"/>
+                </a:solidFill>
+                <a:latin typeface="+mn-lt"/>
+                <a:ea typeface="+mn-ea"/>
+                <a:cs typeface="+mn-cs"/>
+              </a:defRPr>
+            </a:lvl1pPr>
+            <a:lvl2pPr marL="685800" indent="-228600" algn="l" rtl="0" fontAlgn="base">
+              <a:lnSpc>
+                <a:spcPct val="90000"/>
+              </a:lnSpc>
+              <a:spcBef>
+                <a:spcPts val="500"/>
+              </a:spcBef>
+              <a:spcAft>
+                <a:spcPct val="0"/>
+              </a:spcAft>
+              <a:buFont typeface="Arial" panose="020B0604020202090204" pitchFamily="34" charset="0"/>
+              <a:buChar char="•"/>
+              <a:defRPr sz="2400" kern="1200">
+                <a:solidFill>
+                  <a:schemeClr val="tx1"/>
+                </a:solidFill>
+                <a:latin typeface="+mn-lt"/>
+                <a:ea typeface="+mn-ea"/>
+                <a:cs typeface="+mn-cs"/>
+              </a:defRPr>
+            </a:lvl2pPr>
+            <a:lvl3pPr marL="1143000" indent="-228600" algn="l" rtl="0" fontAlgn="base">
+              <a:lnSpc>
+                <a:spcPct val="90000"/>
+              </a:lnSpc>
+              <a:spcBef>
+                <a:spcPts val="500"/>
+              </a:spcBef>
+              <a:spcAft>
+                <a:spcPct val="0"/>
+              </a:spcAft>
+              <a:buFont typeface="Arial" panose="020B0604020202090204" pitchFamily="34" charset="0"/>
+              <a:buChar char="•"/>
+              <a:defRPr sz="2000" kern="1200">
+                <a:solidFill>
+                  <a:schemeClr val="tx1"/>
+                </a:solidFill>
+                <a:latin typeface="+mn-lt"/>
+                <a:ea typeface="+mn-ea"/>
+                <a:cs typeface="+mn-cs"/>
+              </a:defRPr>
+            </a:lvl3pPr>
+            <a:lvl4pPr marL="1600200" indent="-228600" algn="l" rtl="0" fontAlgn="base">
+              <a:lnSpc>
+                <a:spcPct val="90000"/>
+              </a:lnSpc>
+              <a:spcBef>
+                <a:spcPts val="500"/>
+              </a:spcBef>
+              <a:spcAft>
+                <a:spcPct val="0"/>
+              </a:spcAft>
+              <a:buFont typeface="Arial" panose="020B0604020202090204" pitchFamily="34" charset="0"/>
+              <a:buChar char="•"/>
+              <a:defRPr sz="2000" kern="1200">
+                <a:solidFill>
+                  <a:schemeClr val="tx1"/>
+                </a:solidFill>
+                <a:latin typeface="+mn-lt"/>
+                <a:ea typeface="+mn-ea"/>
+                <a:cs typeface="+mn-cs"/>
+              </a:defRPr>
+            </a:lvl4pPr>
+            <a:lvl5pPr marL="2057400" indent="-228600" algn="l" rtl="0" fontAlgn="base">
+              <a:lnSpc>
+                <a:spcPct val="90000"/>
+              </a:lnSpc>
+              <a:spcBef>
+                <a:spcPts val="500"/>
+              </a:spcBef>
+              <a:spcAft>
+                <a:spcPct val="0"/>
+              </a:spcAft>
+              <a:buFont typeface="Arial" panose="020B0604020202090204" pitchFamily="34" charset="0"/>
+              <a:buChar char="•"/>
+              <a:defRPr sz="2000" kern="1200">
+                <a:solidFill>
+                  <a:schemeClr val="tx1"/>
+                </a:solidFill>
+                <a:latin typeface="+mn-lt"/>
+                <a:ea typeface="+mn-ea"/>
+                <a:cs typeface="+mn-cs"/>
+              </a:defRPr>
+            </a:lvl5pPr>
+            <a:lvl6pPr marL="2514600" indent="-228600" algn="l" defTabSz="914400" rtl="0" eaLnBrk="1" latinLnBrk="0" hangingPunct="1">
+              <a:lnSpc>
+                <a:spcPct val="90000"/>
+              </a:lnSpc>
+              <a:spcBef>
+                <a:spcPts val="500"/>
+              </a:spcBef>
+              <a:buFont typeface="Arial" panose="020B0604020202090204" pitchFamily="34" charset="0"/>
+              <a:buChar char="•"/>
+              <a:defRPr sz="1800" kern="1200">
+                <a:solidFill>
+                  <a:schemeClr val="tx1"/>
+                </a:solidFill>
+                <a:latin typeface="+mn-lt"/>
+                <a:ea typeface="+mn-ea"/>
+                <a:cs typeface="+mn-cs"/>
+              </a:defRPr>
+            </a:lvl6pPr>
+            <a:lvl7pPr marL="2971800" indent="-228600" algn="l" defTabSz="914400" rtl="0" eaLnBrk="1" latinLnBrk="0" hangingPunct="1">
+              <a:lnSpc>
+                <a:spcPct val="90000"/>
+              </a:lnSpc>
+              <a:spcBef>
+                <a:spcPts val="500"/>
+              </a:spcBef>
+              <a:buFont typeface="Arial" panose="020B0604020202090204" pitchFamily="34" charset="0"/>
+              <a:buChar char="•"/>
+              <a:defRPr sz="1800" kern="1200">
+                <a:solidFill>
+                  <a:schemeClr val="tx1"/>
+                </a:solidFill>
+                <a:latin typeface="+mn-lt"/>
+                <a:ea typeface="+mn-ea"/>
+                <a:cs typeface="+mn-cs"/>
+              </a:defRPr>
+            </a:lvl7pPr>
+            <a:lvl8pPr marL="3429000" indent="-228600" algn="l" defTabSz="914400" rtl="0" eaLnBrk="1" latinLnBrk="0" hangingPunct="1">
+              <a:lnSpc>
+                <a:spcPct val="90000"/>
+              </a:lnSpc>
+              <a:spcBef>
+                <a:spcPts val="500"/>
+              </a:spcBef>
+              <a:buFont typeface="Arial" panose="020B0604020202090204" pitchFamily="34" charset="0"/>
+              <a:buChar char="•"/>
+              <a:defRPr sz="1800" kern="1200">
+                <a:solidFill>
+                  <a:schemeClr val="tx1"/>
+                </a:solidFill>
+                <a:latin typeface="+mn-lt"/>
+                <a:ea typeface="+mn-ea"/>
+                <a:cs typeface="+mn-cs"/>
+              </a:defRPr>
+            </a:lvl8pPr>
+            <a:lvl9pPr marL="3886200" indent="-228600" algn="l" defTabSz="914400" rtl="0" eaLnBrk="1" latinLnBrk="0" hangingPunct="1">
+              <a:lnSpc>
+                <a:spcPct val="90000"/>
+              </a:lnSpc>
+              <a:spcBef>
+                <a:spcPts val="500"/>
+              </a:spcBef>
+              <a:buFont typeface="Arial" panose="020B0604020202090204" pitchFamily="34" charset="0"/>
+              <a:buChar char="•"/>
+              <a:defRPr sz="1800" kern="1200">
+                <a:solidFill>
+                  <a:schemeClr val="tx1"/>
+                </a:solidFill>
+                <a:latin typeface="+mn-lt"/>
+                <a:ea typeface="+mn-ea"/>
+                <a:cs typeface="+mn-cs"/>
+              </a:defRPr>
+            </a:lvl9pPr>
+          </a:lstStyle>
+          <a:p>
+            <a:pPr marL="0" indent="0">
+              <a:buNone/>
+            </a:pPr>
+            <a:r>
+              <a:rPr lang="en-US"/>
+              <a:t>Spring Boot</a:t>
+            </a:r>
+            <a:endParaRPr lang="en-US"/>
+          </a:p>
+        </p:txBody>
+      </p:sp>
+    </p:spTree>
+  </p:cSld>
+  <p:clrMapOvr>
+    <a:masterClrMapping/>
+  </p:clrMapOvr>
+</p:sld>
+</file>
+
+<file path=ppt/slides/slide17.xml><?xml version="1.0" encoding="utf-8"?>
 <p:sld xmlns:a="http://schemas.openxmlformats.org/drawingml/2006/main" xmlns:r="http://schemas.openxmlformats.org/officeDocument/2006/relationships" xmlns:p="http://schemas.openxmlformats.org/presentationml/2006/main">
   <p:cSld>
     <p:bg>
@@ -17471,7 +17785,7 @@
           <a:p>
             <a:r>
               <a:rPr lang="en-US" altLang="en-US"/>
-              <a:t>It’s especially helpful for students and professionals who want to build something that just works — fast.</a:t>
+              <a:t>It’s especially helpful for students and professionals who want to build something that just works ‘fast’.</a:t>
             </a:r>
             <a:endParaRPr lang="en-US" altLang="en-US"/>
           </a:p>
@@ -19350,7 +19664,18 @@
                 <a:latin typeface="Microsoft YaHei" pitchFamily="34" charset="-122"/>
                 <a:ea typeface="Microsoft YaHei" pitchFamily="34" charset="-122"/>
               </a:rPr>
-              <a:t>1. Auto-configuration: Automatically sets up things for you.</a:t>
+              <a:t>1. </a:t>
+            </a:r>
+            <a:r>
+              <a:rPr lang="en-US" altLang="en-US" sz="1600" dirty="0">
+                <a:solidFill>
+                  <a:srgbClr val="000000"/>
+                </a:solidFill>
+                <a:latin typeface="Microsoft YaHei" pitchFamily="34" charset="-122"/>
+                <a:ea typeface="Microsoft YaHei" pitchFamily="34" charset="-122"/>
+                <a:sym typeface="+mn-ea"/>
+              </a:rPr>
+              <a:t>Embedded servers: You don’t need to install Tomcat or Jetty separately.</a:t>
             </a:r>
             <a:endParaRPr lang="en-US" altLang="en-US" sz="1600" dirty="0">
               <a:solidFill>
@@ -19379,7 +19704,18 @@
                 <a:latin typeface="Microsoft YaHei" pitchFamily="34" charset="-122"/>
                 <a:ea typeface="Microsoft YaHei" pitchFamily="34" charset="-122"/>
               </a:rPr>
-              <a:t>2. Embedded servers: You don’t need to install Tomcat or Jetty separately.</a:t>
+              <a:t>2. </a:t>
+            </a:r>
+            <a:r>
+              <a:rPr lang="en-US" altLang="en-US" sz="1600" dirty="0">
+                <a:solidFill>
+                  <a:srgbClr val="000000"/>
+                </a:solidFill>
+                <a:latin typeface="Microsoft YaHei" pitchFamily="34" charset="-122"/>
+                <a:ea typeface="Microsoft YaHei" pitchFamily="34" charset="-122"/>
+                <a:sym typeface="+mn-ea"/>
+              </a:rPr>
+              <a:t>Auto-configuration: Automatically sets up things for you.</a:t>
             </a:r>
             <a:endParaRPr lang="en-US" altLang="en-US" sz="1600" dirty="0">
               <a:solidFill>

--- a/Class_Presentation.pptx
+++ b/Class_Presentation.pptx
@@ -25,8 +25,8 @@
     <p:sldId id="283" r:id="rId15"/>
     <p:sldId id="296" r:id="rId16"/>
     <p:sldId id="294" r:id="rId17"/>
-    <p:sldId id="275" r:id="rId18"/>
-    <p:sldId id="298" r:id="rId19"/>
+    <p:sldId id="298" r:id="rId18"/>
+    <p:sldId id="275" r:id="rId19"/>
     <p:sldId id="262" r:id="rId20"/>
   </p:sldIdLst>
   <p:sldSz cx="12192000" cy="6858000"/>
@@ -5959,6 +5959,319 @@
         <p:nvPr/>
       </p:nvGrpSpPr>
       <p:grpSpPr/>
+      <p:sp>
+        <p:nvSpPr>
+          <p:cNvPr id="2" name="Title 1"/>
+          <p:cNvSpPr>
+            <a:spLocks noGrp="1"/>
+          </p:cNvSpPr>
+          <p:nvPr>
+            <p:ph type="title"/>
+          </p:nvPr>
+        </p:nvSpPr>
+        <p:spPr>
+          <a:xfrm>
+            <a:off x="327025" y="0"/>
+            <a:ext cx="4542155" cy="1123950"/>
+          </a:xfrm>
+        </p:spPr>
+        <p:txBody>
+          <a:bodyPr/>
+          <a:p>
+            <a:r>
+              <a:rPr lang="en-US" sz="4000"/>
+              <a:t>Main Differences</a:t>
+            </a:r>
+            <a:endParaRPr lang="en-US" sz="4000"/>
+          </a:p>
+        </p:txBody>
+      </p:sp>
+      <p:sp>
+        <p:nvSpPr>
+          <p:cNvPr id="3" name="Content Placeholder 2"/>
+          <p:cNvSpPr>
+            <a:spLocks noGrp="1"/>
+          </p:cNvSpPr>
+          <p:nvPr>
+            <p:ph idx="1"/>
+          </p:nvPr>
+        </p:nvSpPr>
+        <p:spPr>
+          <a:xfrm>
+            <a:off x="3422650" y="1026795"/>
+            <a:ext cx="1446530" cy="605790"/>
+          </a:xfrm>
+        </p:spPr>
+        <p:txBody>
+          <a:bodyPr/>
+          <a:p>
+            <a:pPr marL="0" indent="0">
+              <a:buNone/>
+            </a:pPr>
+            <a:r>
+              <a:rPr lang="en-US"/>
+              <a:t>Spring</a:t>
+            </a:r>
+            <a:endParaRPr lang="en-US"/>
+          </a:p>
+        </p:txBody>
+      </p:sp>
+      <p:pic>
+        <p:nvPicPr>
+          <p:cNvPr id="4" name="Picture 3" descr="Screenshot 2025-10-17 at 1.28.32 PM"/>
+          <p:cNvPicPr>
+            <a:picLocks noChangeAspect="1"/>
+          </p:cNvPicPr>
+          <p:nvPr/>
+        </p:nvPicPr>
+        <p:blipFill>
+          <a:blip r:embed="rId1"/>
+          <a:stretch>
+            <a:fillRect/>
+          </a:stretch>
+        </p:blipFill>
+        <p:spPr>
+          <a:xfrm>
+            <a:off x="939800" y="1825625"/>
+            <a:ext cx="10312400" cy="4610100"/>
+          </a:xfrm>
+          <a:prstGeom prst="rect">
+            <a:avLst/>
+          </a:prstGeom>
+        </p:spPr>
+      </p:pic>
+      <p:sp>
+        <p:nvSpPr>
+          <p:cNvPr id="5" name="Content Placeholder 2"/>
+          <p:cNvSpPr>
+            <a:spLocks noGrp="1"/>
+          </p:cNvSpPr>
+          <p:nvPr/>
+        </p:nvSpPr>
+        <p:spPr>
+          <a:xfrm>
+            <a:off x="7029450" y="1026795"/>
+            <a:ext cx="3063875" cy="605790"/>
+          </a:xfrm>
+          <a:prstGeom prst="rect">
+            <a:avLst/>
+          </a:prstGeom>
+          <a:noFill/>
+          <a:ln w="9525">
+            <a:noFill/>
+          </a:ln>
+        </p:spPr>
+        <p:txBody>
+          <a:bodyPr anchor="t" anchorCtr="0"/>
+          <a:lstStyle>
+            <a:lvl1pPr marL="228600" indent="-228600" algn="l" rtl="0" fontAlgn="base">
+              <a:lnSpc>
+                <a:spcPct val="90000"/>
+              </a:lnSpc>
+              <a:spcBef>
+                <a:spcPts val="1000"/>
+              </a:spcBef>
+              <a:spcAft>
+                <a:spcPct val="0"/>
+              </a:spcAft>
+              <a:buFont typeface="Arial" panose="020B0604020202090204" pitchFamily="34" charset="0"/>
+              <a:buChar char="•"/>
+              <a:defRPr sz="2800" kern="1200">
+                <a:solidFill>
+                  <a:schemeClr val="tx1"/>
+                </a:solidFill>
+                <a:latin typeface="+mn-lt"/>
+                <a:ea typeface="+mn-ea"/>
+                <a:cs typeface="+mn-cs"/>
+              </a:defRPr>
+            </a:lvl1pPr>
+            <a:lvl2pPr marL="685800" indent="-228600" algn="l" rtl="0" fontAlgn="base">
+              <a:lnSpc>
+                <a:spcPct val="90000"/>
+              </a:lnSpc>
+              <a:spcBef>
+                <a:spcPts val="500"/>
+              </a:spcBef>
+              <a:spcAft>
+                <a:spcPct val="0"/>
+              </a:spcAft>
+              <a:buFont typeface="Arial" panose="020B0604020202090204" pitchFamily="34" charset="0"/>
+              <a:buChar char="•"/>
+              <a:defRPr sz="2400" kern="1200">
+                <a:solidFill>
+                  <a:schemeClr val="tx1"/>
+                </a:solidFill>
+                <a:latin typeface="+mn-lt"/>
+                <a:ea typeface="+mn-ea"/>
+                <a:cs typeface="+mn-cs"/>
+              </a:defRPr>
+            </a:lvl2pPr>
+            <a:lvl3pPr marL="1143000" indent="-228600" algn="l" rtl="0" fontAlgn="base">
+              <a:lnSpc>
+                <a:spcPct val="90000"/>
+              </a:lnSpc>
+              <a:spcBef>
+                <a:spcPts val="500"/>
+              </a:spcBef>
+              <a:spcAft>
+                <a:spcPct val="0"/>
+              </a:spcAft>
+              <a:buFont typeface="Arial" panose="020B0604020202090204" pitchFamily="34" charset="0"/>
+              <a:buChar char="•"/>
+              <a:defRPr sz="2000" kern="1200">
+                <a:solidFill>
+                  <a:schemeClr val="tx1"/>
+                </a:solidFill>
+                <a:latin typeface="+mn-lt"/>
+                <a:ea typeface="+mn-ea"/>
+                <a:cs typeface="+mn-cs"/>
+              </a:defRPr>
+            </a:lvl3pPr>
+            <a:lvl4pPr marL="1600200" indent="-228600" algn="l" rtl="0" fontAlgn="base">
+              <a:lnSpc>
+                <a:spcPct val="90000"/>
+              </a:lnSpc>
+              <a:spcBef>
+                <a:spcPts val="500"/>
+              </a:spcBef>
+              <a:spcAft>
+                <a:spcPct val="0"/>
+              </a:spcAft>
+              <a:buFont typeface="Arial" panose="020B0604020202090204" pitchFamily="34" charset="0"/>
+              <a:buChar char="•"/>
+              <a:defRPr sz="2000" kern="1200">
+                <a:solidFill>
+                  <a:schemeClr val="tx1"/>
+                </a:solidFill>
+                <a:latin typeface="+mn-lt"/>
+                <a:ea typeface="+mn-ea"/>
+                <a:cs typeface="+mn-cs"/>
+              </a:defRPr>
+            </a:lvl4pPr>
+            <a:lvl5pPr marL="2057400" indent="-228600" algn="l" rtl="0" fontAlgn="base">
+              <a:lnSpc>
+                <a:spcPct val="90000"/>
+              </a:lnSpc>
+              <a:spcBef>
+                <a:spcPts val="500"/>
+              </a:spcBef>
+              <a:spcAft>
+                <a:spcPct val="0"/>
+              </a:spcAft>
+              <a:buFont typeface="Arial" panose="020B0604020202090204" pitchFamily="34" charset="0"/>
+              <a:buChar char="•"/>
+              <a:defRPr sz="2000" kern="1200">
+                <a:solidFill>
+                  <a:schemeClr val="tx1"/>
+                </a:solidFill>
+                <a:latin typeface="+mn-lt"/>
+                <a:ea typeface="+mn-ea"/>
+                <a:cs typeface="+mn-cs"/>
+              </a:defRPr>
+            </a:lvl5pPr>
+            <a:lvl6pPr marL="2514600" indent="-228600" algn="l" defTabSz="914400" rtl="0" eaLnBrk="1" latinLnBrk="0" hangingPunct="1">
+              <a:lnSpc>
+                <a:spcPct val="90000"/>
+              </a:lnSpc>
+              <a:spcBef>
+                <a:spcPts val="500"/>
+              </a:spcBef>
+              <a:buFont typeface="Arial" panose="020B0604020202090204" pitchFamily="34" charset="0"/>
+              <a:buChar char="•"/>
+              <a:defRPr sz="1800" kern="1200">
+                <a:solidFill>
+                  <a:schemeClr val="tx1"/>
+                </a:solidFill>
+                <a:latin typeface="+mn-lt"/>
+                <a:ea typeface="+mn-ea"/>
+                <a:cs typeface="+mn-cs"/>
+              </a:defRPr>
+            </a:lvl6pPr>
+            <a:lvl7pPr marL="2971800" indent="-228600" algn="l" defTabSz="914400" rtl="0" eaLnBrk="1" latinLnBrk="0" hangingPunct="1">
+              <a:lnSpc>
+                <a:spcPct val="90000"/>
+              </a:lnSpc>
+              <a:spcBef>
+                <a:spcPts val="500"/>
+              </a:spcBef>
+              <a:buFont typeface="Arial" panose="020B0604020202090204" pitchFamily="34" charset="0"/>
+              <a:buChar char="•"/>
+              <a:defRPr sz="1800" kern="1200">
+                <a:solidFill>
+                  <a:schemeClr val="tx1"/>
+                </a:solidFill>
+                <a:latin typeface="+mn-lt"/>
+                <a:ea typeface="+mn-ea"/>
+                <a:cs typeface="+mn-cs"/>
+              </a:defRPr>
+            </a:lvl7pPr>
+            <a:lvl8pPr marL="3429000" indent="-228600" algn="l" defTabSz="914400" rtl="0" eaLnBrk="1" latinLnBrk="0" hangingPunct="1">
+              <a:lnSpc>
+                <a:spcPct val="90000"/>
+              </a:lnSpc>
+              <a:spcBef>
+                <a:spcPts val="500"/>
+              </a:spcBef>
+              <a:buFont typeface="Arial" panose="020B0604020202090204" pitchFamily="34" charset="0"/>
+              <a:buChar char="•"/>
+              <a:defRPr sz="1800" kern="1200">
+                <a:solidFill>
+                  <a:schemeClr val="tx1"/>
+                </a:solidFill>
+                <a:latin typeface="+mn-lt"/>
+                <a:ea typeface="+mn-ea"/>
+                <a:cs typeface="+mn-cs"/>
+              </a:defRPr>
+            </a:lvl8pPr>
+            <a:lvl9pPr marL="3886200" indent="-228600" algn="l" defTabSz="914400" rtl="0" eaLnBrk="1" latinLnBrk="0" hangingPunct="1">
+              <a:lnSpc>
+                <a:spcPct val="90000"/>
+              </a:lnSpc>
+              <a:spcBef>
+                <a:spcPts val="500"/>
+              </a:spcBef>
+              <a:buFont typeface="Arial" panose="020B0604020202090204" pitchFamily="34" charset="0"/>
+              <a:buChar char="•"/>
+              <a:defRPr sz="1800" kern="1200">
+                <a:solidFill>
+                  <a:schemeClr val="tx1"/>
+                </a:solidFill>
+                <a:latin typeface="+mn-lt"/>
+                <a:ea typeface="+mn-ea"/>
+                <a:cs typeface="+mn-cs"/>
+              </a:defRPr>
+            </a:lvl9pPr>
+          </a:lstStyle>
+          <a:p>
+            <a:pPr marL="0" indent="0">
+              <a:buNone/>
+            </a:pPr>
+            <a:r>
+              <a:rPr lang="en-US"/>
+              <a:t>Spring Boot</a:t>
+            </a:r>
+            <a:endParaRPr lang="en-US"/>
+          </a:p>
+        </p:txBody>
+      </p:sp>
+    </p:spTree>
+  </p:cSld>
+  <p:clrMapOvr>
+    <a:masterClrMapping/>
+  </p:clrMapOvr>
+</p:sld>
+</file>
+
+<file path=ppt/slides/slide16.xml><?xml version="1.0" encoding="utf-8"?>
+<p:sld xmlns:a="http://schemas.openxmlformats.org/drawingml/2006/main" xmlns:r="http://schemas.openxmlformats.org/officeDocument/2006/relationships" xmlns:p="http://schemas.openxmlformats.org/presentationml/2006/main">
+  <p:cSld>
+    <p:spTree>
+      <p:nvGrpSpPr>
+        <p:cNvPr id="1" name=""/>
+        <p:cNvGrpSpPr/>
+        <p:nvPr/>
+      </p:nvGrpSpPr>
+      <p:grpSpPr/>
       <p:grpSp>
         <p:nvGrpSpPr>
           <p:cNvPr id="17409" name="组合 5"/>
@@ -7419,319 +7732,6 @@
               <a:latin typeface="Microsoft YaHei" pitchFamily="34" charset="-122"/>
               <a:ea typeface="Microsoft YaHei" pitchFamily="34" charset="-122"/>
             </a:endParaRPr>
-          </a:p>
-        </p:txBody>
-      </p:sp>
-    </p:spTree>
-  </p:cSld>
-  <p:clrMapOvr>
-    <a:masterClrMapping/>
-  </p:clrMapOvr>
-</p:sld>
-</file>
-
-<file path=ppt/slides/slide16.xml><?xml version="1.0" encoding="utf-8"?>
-<p:sld xmlns:a="http://schemas.openxmlformats.org/drawingml/2006/main" xmlns:r="http://schemas.openxmlformats.org/officeDocument/2006/relationships" xmlns:p="http://schemas.openxmlformats.org/presentationml/2006/main">
-  <p:cSld>
-    <p:spTree>
-      <p:nvGrpSpPr>
-        <p:cNvPr id="1" name=""/>
-        <p:cNvGrpSpPr/>
-        <p:nvPr/>
-      </p:nvGrpSpPr>
-      <p:grpSpPr/>
-      <p:sp>
-        <p:nvSpPr>
-          <p:cNvPr id="2" name="Title 1"/>
-          <p:cNvSpPr>
-            <a:spLocks noGrp="1"/>
-          </p:cNvSpPr>
-          <p:nvPr>
-            <p:ph type="title"/>
-          </p:nvPr>
-        </p:nvSpPr>
-        <p:spPr>
-          <a:xfrm>
-            <a:off x="327025" y="0"/>
-            <a:ext cx="4542155" cy="1123950"/>
-          </a:xfrm>
-        </p:spPr>
-        <p:txBody>
-          <a:bodyPr/>
-          <a:p>
-            <a:r>
-              <a:rPr lang="en-US" sz="4000"/>
-              <a:t>Main Differences</a:t>
-            </a:r>
-            <a:endParaRPr lang="en-US" sz="4000"/>
-          </a:p>
-        </p:txBody>
-      </p:sp>
-      <p:sp>
-        <p:nvSpPr>
-          <p:cNvPr id="3" name="Content Placeholder 2"/>
-          <p:cNvSpPr>
-            <a:spLocks noGrp="1"/>
-          </p:cNvSpPr>
-          <p:nvPr>
-            <p:ph idx="1"/>
-          </p:nvPr>
-        </p:nvSpPr>
-        <p:spPr>
-          <a:xfrm>
-            <a:off x="3422650" y="1026795"/>
-            <a:ext cx="1446530" cy="605790"/>
-          </a:xfrm>
-        </p:spPr>
-        <p:txBody>
-          <a:bodyPr/>
-          <a:p>
-            <a:pPr marL="0" indent="0">
-              <a:buNone/>
-            </a:pPr>
-            <a:r>
-              <a:rPr lang="en-US"/>
-              <a:t>Spring</a:t>
-            </a:r>
-            <a:endParaRPr lang="en-US"/>
-          </a:p>
-        </p:txBody>
-      </p:sp>
-      <p:pic>
-        <p:nvPicPr>
-          <p:cNvPr id="4" name="Picture 3" descr="Screenshot 2025-10-17 at 1.28.32 PM"/>
-          <p:cNvPicPr>
-            <a:picLocks noChangeAspect="1"/>
-          </p:cNvPicPr>
-          <p:nvPr/>
-        </p:nvPicPr>
-        <p:blipFill>
-          <a:blip r:embed="rId1"/>
-          <a:stretch>
-            <a:fillRect/>
-          </a:stretch>
-        </p:blipFill>
-        <p:spPr>
-          <a:xfrm>
-            <a:off x="939800" y="1825625"/>
-            <a:ext cx="10312400" cy="4610100"/>
-          </a:xfrm>
-          <a:prstGeom prst="rect">
-            <a:avLst/>
-          </a:prstGeom>
-        </p:spPr>
-      </p:pic>
-      <p:sp>
-        <p:nvSpPr>
-          <p:cNvPr id="5" name="Content Placeholder 2"/>
-          <p:cNvSpPr>
-            <a:spLocks noGrp="1"/>
-          </p:cNvSpPr>
-          <p:nvPr/>
-        </p:nvSpPr>
-        <p:spPr>
-          <a:xfrm>
-            <a:off x="7029450" y="1026795"/>
-            <a:ext cx="3063875" cy="605790"/>
-          </a:xfrm>
-          <a:prstGeom prst="rect">
-            <a:avLst/>
-          </a:prstGeom>
-          <a:noFill/>
-          <a:ln w="9525">
-            <a:noFill/>
-          </a:ln>
-        </p:spPr>
-        <p:txBody>
-          <a:bodyPr anchor="t" anchorCtr="0"/>
-          <a:lstStyle>
-            <a:lvl1pPr marL="228600" indent="-228600" algn="l" rtl="0" fontAlgn="base">
-              <a:lnSpc>
-                <a:spcPct val="90000"/>
-              </a:lnSpc>
-              <a:spcBef>
-                <a:spcPts val="1000"/>
-              </a:spcBef>
-              <a:spcAft>
-                <a:spcPct val="0"/>
-              </a:spcAft>
-              <a:buFont typeface="Arial" panose="020B0604020202090204" pitchFamily="34" charset="0"/>
-              <a:buChar char="•"/>
-              <a:defRPr sz="2800" kern="1200">
-                <a:solidFill>
-                  <a:schemeClr val="tx1"/>
-                </a:solidFill>
-                <a:latin typeface="+mn-lt"/>
-                <a:ea typeface="+mn-ea"/>
-                <a:cs typeface="+mn-cs"/>
-              </a:defRPr>
-            </a:lvl1pPr>
-            <a:lvl2pPr marL="685800" indent="-228600" algn="l" rtl="0" fontAlgn="base">
-              <a:lnSpc>
-                <a:spcPct val="90000"/>
-              </a:lnSpc>
-              <a:spcBef>
-                <a:spcPts val="500"/>
-              </a:spcBef>
-              <a:spcAft>
-                <a:spcPct val="0"/>
-              </a:spcAft>
-              <a:buFont typeface="Arial" panose="020B0604020202090204" pitchFamily="34" charset="0"/>
-              <a:buChar char="•"/>
-              <a:defRPr sz="2400" kern="1200">
-                <a:solidFill>
-                  <a:schemeClr val="tx1"/>
-                </a:solidFill>
-                <a:latin typeface="+mn-lt"/>
-                <a:ea typeface="+mn-ea"/>
-                <a:cs typeface="+mn-cs"/>
-              </a:defRPr>
-            </a:lvl2pPr>
-            <a:lvl3pPr marL="1143000" indent="-228600" algn="l" rtl="0" fontAlgn="base">
-              <a:lnSpc>
-                <a:spcPct val="90000"/>
-              </a:lnSpc>
-              <a:spcBef>
-                <a:spcPts val="500"/>
-              </a:spcBef>
-              <a:spcAft>
-                <a:spcPct val="0"/>
-              </a:spcAft>
-              <a:buFont typeface="Arial" panose="020B0604020202090204" pitchFamily="34" charset="0"/>
-              <a:buChar char="•"/>
-              <a:defRPr sz="2000" kern="1200">
-                <a:solidFill>
-                  <a:schemeClr val="tx1"/>
-                </a:solidFill>
-                <a:latin typeface="+mn-lt"/>
-                <a:ea typeface="+mn-ea"/>
-                <a:cs typeface="+mn-cs"/>
-              </a:defRPr>
-            </a:lvl3pPr>
-            <a:lvl4pPr marL="1600200" indent="-228600" algn="l" rtl="0" fontAlgn="base">
-              <a:lnSpc>
-                <a:spcPct val="90000"/>
-              </a:lnSpc>
-              <a:spcBef>
-                <a:spcPts val="500"/>
-              </a:spcBef>
-              <a:spcAft>
-                <a:spcPct val="0"/>
-              </a:spcAft>
-              <a:buFont typeface="Arial" panose="020B0604020202090204" pitchFamily="34" charset="0"/>
-              <a:buChar char="•"/>
-              <a:defRPr sz="2000" kern="1200">
-                <a:solidFill>
-                  <a:schemeClr val="tx1"/>
-                </a:solidFill>
-                <a:latin typeface="+mn-lt"/>
-                <a:ea typeface="+mn-ea"/>
-                <a:cs typeface="+mn-cs"/>
-              </a:defRPr>
-            </a:lvl4pPr>
-            <a:lvl5pPr marL="2057400" indent="-228600" algn="l" rtl="0" fontAlgn="base">
-              <a:lnSpc>
-                <a:spcPct val="90000"/>
-              </a:lnSpc>
-              <a:spcBef>
-                <a:spcPts val="500"/>
-              </a:spcBef>
-              <a:spcAft>
-                <a:spcPct val="0"/>
-              </a:spcAft>
-              <a:buFont typeface="Arial" panose="020B0604020202090204" pitchFamily="34" charset="0"/>
-              <a:buChar char="•"/>
-              <a:defRPr sz="2000" kern="1200">
-                <a:solidFill>
-                  <a:schemeClr val="tx1"/>
-                </a:solidFill>
-                <a:latin typeface="+mn-lt"/>
-                <a:ea typeface="+mn-ea"/>
-                <a:cs typeface="+mn-cs"/>
-              </a:defRPr>
-            </a:lvl5pPr>
-            <a:lvl6pPr marL="2514600" indent="-228600" algn="l" defTabSz="914400" rtl="0" eaLnBrk="1" latinLnBrk="0" hangingPunct="1">
-              <a:lnSpc>
-                <a:spcPct val="90000"/>
-              </a:lnSpc>
-              <a:spcBef>
-                <a:spcPts val="500"/>
-              </a:spcBef>
-              <a:buFont typeface="Arial" panose="020B0604020202090204" pitchFamily="34" charset="0"/>
-              <a:buChar char="•"/>
-              <a:defRPr sz="1800" kern="1200">
-                <a:solidFill>
-                  <a:schemeClr val="tx1"/>
-                </a:solidFill>
-                <a:latin typeface="+mn-lt"/>
-                <a:ea typeface="+mn-ea"/>
-                <a:cs typeface="+mn-cs"/>
-              </a:defRPr>
-            </a:lvl6pPr>
-            <a:lvl7pPr marL="2971800" indent="-228600" algn="l" defTabSz="914400" rtl="0" eaLnBrk="1" latinLnBrk="0" hangingPunct="1">
-              <a:lnSpc>
-                <a:spcPct val="90000"/>
-              </a:lnSpc>
-              <a:spcBef>
-                <a:spcPts val="500"/>
-              </a:spcBef>
-              <a:buFont typeface="Arial" panose="020B0604020202090204" pitchFamily="34" charset="0"/>
-              <a:buChar char="•"/>
-              <a:defRPr sz="1800" kern="1200">
-                <a:solidFill>
-                  <a:schemeClr val="tx1"/>
-                </a:solidFill>
-                <a:latin typeface="+mn-lt"/>
-                <a:ea typeface="+mn-ea"/>
-                <a:cs typeface="+mn-cs"/>
-              </a:defRPr>
-            </a:lvl7pPr>
-            <a:lvl8pPr marL="3429000" indent="-228600" algn="l" defTabSz="914400" rtl="0" eaLnBrk="1" latinLnBrk="0" hangingPunct="1">
-              <a:lnSpc>
-                <a:spcPct val="90000"/>
-              </a:lnSpc>
-              <a:spcBef>
-                <a:spcPts val="500"/>
-              </a:spcBef>
-              <a:buFont typeface="Arial" panose="020B0604020202090204" pitchFamily="34" charset="0"/>
-              <a:buChar char="•"/>
-              <a:defRPr sz="1800" kern="1200">
-                <a:solidFill>
-                  <a:schemeClr val="tx1"/>
-                </a:solidFill>
-                <a:latin typeface="+mn-lt"/>
-                <a:ea typeface="+mn-ea"/>
-                <a:cs typeface="+mn-cs"/>
-              </a:defRPr>
-            </a:lvl8pPr>
-            <a:lvl9pPr marL="3886200" indent="-228600" algn="l" defTabSz="914400" rtl="0" eaLnBrk="1" latinLnBrk="0" hangingPunct="1">
-              <a:lnSpc>
-                <a:spcPct val="90000"/>
-              </a:lnSpc>
-              <a:spcBef>
-                <a:spcPts val="500"/>
-              </a:spcBef>
-              <a:buFont typeface="Arial" panose="020B0604020202090204" pitchFamily="34" charset="0"/>
-              <a:buChar char="•"/>
-              <a:defRPr sz="1800" kern="1200">
-                <a:solidFill>
-                  <a:schemeClr val="tx1"/>
-                </a:solidFill>
-                <a:latin typeface="+mn-lt"/>
-                <a:ea typeface="+mn-ea"/>
-                <a:cs typeface="+mn-cs"/>
-              </a:defRPr>
-            </a:lvl9pPr>
-          </a:lstStyle>
-          <a:p>
-            <a:pPr marL="0" indent="0">
-              <a:buNone/>
-            </a:pPr>
-            <a:r>
-              <a:rPr lang="en-US"/>
-              <a:t>Spring Boot</a:t>
-            </a:r>
-            <a:endParaRPr lang="en-US"/>
           </a:p>
         </p:txBody>
       </p:sp>

--- a/Class_Presentation.pptx
+++ b/Class_Presentation.pptx
@@ -4017,7 +4017,7 @@
             <a:pPr algn="l"/>
             <a:r>
               <a:rPr lang="en-US" altLang="en-US" sz="2000"/>
-              <a:t>	This line defines where this class is stored, like an address for my code.</a:t>
+              <a:t>	This line defines where this class is stored, like an address for the code.</a:t>
             </a:r>
             <a:endParaRPr lang="en-US" altLang="en-US" sz="2000"/>
           </a:p>
@@ -5269,7 +5269,7 @@
         </p:nvSpPr>
         <p:spPr>
           <a:xfrm>
-            <a:off x="0" y="4826635"/>
+            <a:off x="0" y="4591050"/>
             <a:ext cx="4142740" cy="1111885"/>
           </a:xfrm>
           <a:prstGeom prst="rect">
@@ -5941,6 +5941,208 @@
           </a:prstGeom>
         </p:spPr>
       </p:pic>
+      <p:sp>
+        <p:nvSpPr>
+          <p:cNvPr id="3" name="Title 1"/>
+          <p:cNvSpPr>
+            <a:spLocks noGrp="1"/>
+          </p:cNvSpPr>
+          <p:nvPr/>
+        </p:nvSpPr>
+        <p:spPr>
+          <a:xfrm>
+            <a:off x="320675" y="5987415"/>
+            <a:ext cx="3712845" cy="874395"/>
+          </a:xfrm>
+          <a:prstGeom prst="rect">
+            <a:avLst/>
+          </a:prstGeom>
+          <a:noFill/>
+          <a:ln w="9525">
+            <a:noFill/>
+          </a:ln>
+        </p:spPr>
+        <p:txBody>
+          <a:bodyPr anchor="ctr" anchorCtr="0"/>
+          <a:lstStyle>
+            <a:lvl1pPr algn="l" rtl="0" fontAlgn="base">
+              <a:lnSpc>
+                <a:spcPct val="90000"/>
+              </a:lnSpc>
+              <a:spcBef>
+                <a:spcPct val="0"/>
+              </a:spcBef>
+              <a:spcAft>
+                <a:spcPct val="0"/>
+              </a:spcAft>
+              <a:defRPr sz="4400" kern="1200">
+                <a:solidFill>
+                  <a:schemeClr val="tx1"/>
+                </a:solidFill>
+                <a:latin typeface="+mj-lt"/>
+                <a:ea typeface="+mj-ea"/>
+                <a:cs typeface="+mj-cs"/>
+              </a:defRPr>
+            </a:lvl1pPr>
+            <a:lvl2pPr algn="l" rtl="0" fontAlgn="base">
+              <a:lnSpc>
+                <a:spcPct val="90000"/>
+              </a:lnSpc>
+              <a:spcBef>
+                <a:spcPct val="0"/>
+              </a:spcBef>
+              <a:spcAft>
+                <a:spcPct val="0"/>
+              </a:spcAft>
+              <a:defRPr sz="4400">
+                <a:solidFill>
+                  <a:schemeClr val="tx1"/>
+                </a:solidFill>
+                <a:latin typeface="等线 Light" pitchFamily="2" charset="-122"/>
+                <a:ea typeface="等线 Light" pitchFamily="2" charset="-122"/>
+              </a:defRPr>
+            </a:lvl2pPr>
+            <a:lvl3pPr algn="l" rtl="0" fontAlgn="base">
+              <a:lnSpc>
+                <a:spcPct val="90000"/>
+              </a:lnSpc>
+              <a:spcBef>
+                <a:spcPct val="0"/>
+              </a:spcBef>
+              <a:spcAft>
+                <a:spcPct val="0"/>
+              </a:spcAft>
+              <a:defRPr sz="4400">
+                <a:solidFill>
+                  <a:schemeClr val="tx1"/>
+                </a:solidFill>
+                <a:latin typeface="等线 Light" pitchFamily="2" charset="-122"/>
+                <a:ea typeface="等线 Light" pitchFamily="2" charset="-122"/>
+              </a:defRPr>
+            </a:lvl3pPr>
+            <a:lvl4pPr algn="l" rtl="0" fontAlgn="base">
+              <a:lnSpc>
+                <a:spcPct val="90000"/>
+              </a:lnSpc>
+              <a:spcBef>
+                <a:spcPct val="0"/>
+              </a:spcBef>
+              <a:spcAft>
+                <a:spcPct val="0"/>
+              </a:spcAft>
+              <a:defRPr sz="4400">
+                <a:solidFill>
+                  <a:schemeClr val="tx1"/>
+                </a:solidFill>
+                <a:latin typeface="等线 Light" pitchFamily="2" charset="-122"/>
+                <a:ea typeface="等线 Light" pitchFamily="2" charset="-122"/>
+              </a:defRPr>
+            </a:lvl4pPr>
+            <a:lvl5pPr algn="l" rtl="0" fontAlgn="base">
+              <a:lnSpc>
+                <a:spcPct val="90000"/>
+              </a:lnSpc>
+              <a:spcBef>
+                <a:spcPct val="0"/>
+              </a:spcBef>
+              <a:spcAft>
+                <a:spcPct val="0"/>
+              </a:spcAft>
+              <a:defRPr sz="4400">
+                <a:solidFill>
+                  <a:schemeClr val="tx1"/>
+                </a:solidFill>
+                <a:latin typeface="等线 Light" pitchFamily="2" charset="-122"/>
+                <a:ea typeface="等线 Light" pitchFamily="2" charset="-122"/>
+              </a:defRPr>
+            </a:lvl5pPr>
+            <a:lvl6pPr marL="457200" algn="l" rtl="0" fontAlgn="base">
+              <a:lnSpc>
+                <a:spcPct val="90000"/>
+              </a:lnSpc>
+              <a:spcBef>
+                <a:spcPct val="0"/>
+              </a:spcBef>
+              <a:spcAft>
+                <a:spcPct val="0"/>
+              </a:spcAft>
+              <a:defRPr sz="4400">
+                <a:solidFill>
+                  <a:schemeClr val="tx1"/>
+                </a:solidFill>
+                <a:latin typeface="等线 Light" pitchFamily="2" charset="-122"/>
+                <a:ea typeface="等线 Light" pitchFamily="2" charset="-122"/>
+              </a:defRPr>
+            </a:lvl6pPr>
+            <a:lvl7pPr marL="914400" algn="l" rtl="0" fontAlgn="base">
+              <a:lnSpc>
+                <a:spcPct val="90000"/>
+              </a:lnSpc>
+              <a:spcBef>
+                <a:spcPct val="0"/>
+              </a:spcBef>
+              <a:spcAft>
+                <a:spcPct val="0"/>
+              </a:spcAft>
+              <a:defRPr sz="4400">
+                <a:solidFill>
+                  <a:schemeClr val="tx1"/>
+                </a:solidFill>
+                <a:latin typeface="等线 Light" pitchFamily="2" charset="-122"/>
+                <a:ea typeface="等线 Light" pitchFamily="2" charset="-122"/>
+              </a:defRPr>
+            </a:lvl7pPr>
+            <a:lvl8pPr marL="1371600" algn="l" rtl="0" fontAlgn="base">
+              <a:lnSpc>
+                <a:spcPct val="90000"/>
+              </a:lnSpc>
+              <a:spcBef>
+                <a:spcPct val="0"/>
+              </a:spcBef>
+              <a:spcAft>
+                <a:spcPct val="0"/>
+              </a:spcAft>
+              <a:defRPr sz="4400">
+                <a:solidFill>
+                  <a:schemeClr val="tx1"/>
+                </a:solidFill>
+                <a:latin typeface="等线 Light" pitchFamily="2" charset="-122"/>
+                <a:ea typeface="等线 Light" pitchFamily="2" charset="-122"/>
+              </a:defRPr>
+            </a:lvl8pPr>
+            <a:lvl9pPr marL="1828800" algn="l" rtl="0" fontAlgn="base">
+              <a:lnSpc>
+                <a:spcPct val="90000"/>
+              </a:lnSpc>
+              <a:spcBef>
+                <a:spcPct val="0"/>
+              </a:spcBef>
+              <a:spcAft>
+                <a:spcPct val="0"/>
+              </a:spcAft>
+              <a:defRPr sz="4400">
+                <a:solidFill>
+                  <a:schemeClr val="tx1"/>
+                </a:solidFill>
+                <a:latin typeface="等线 Light" pitchFamily="2" charset="-122"/>
+                <a:ea typeface="等线 Light" pitchFamily="2" charset="-122"/>
+              </a:defRPr>
+            </a:lvl9pPr>
+          </a:lstStyle>
+          <a:p>
+            <a:pPr indent="457200" algn="l"/>
+            <a:r>
+              <a:rPr lang="en-US" altLang="en-US" sz="2000" b="1"/>
+              <a:t>Output</a:t>
+            </a:r>
+            <a:r>
+              <a:rPr lang="en-US" altLang="en-US" sz="2000"/>
+              <a:t>: Browser shows “Hello, Spring Boot!”</a:t>
+            </a:r>
+            <a:endParaRPr lang="en-US" altLang="en-US" sz="2000"/>
+          </a:p>
+        </p:txBody>
+      </p:sp>
     </p:spTree>
   </p:cSld>
   <p:clrMapOvr>

--- a/Class_Presentation.pptx
+++ b/Class_Presentation.pptx
@@ -8,7 +8,7 @@
     <p:notesMasterId r:id="rId4"/>
   </p:notesMasterIdLst>
   <p:handoutMasterIdLst>
-    <p:handoutMasterId r:id="rId21"/>
+    <p:handoutMasterId r:id="rId22"/>
   </p:handoutMasterIdLst>
   <p:sldIdLst>
     <p:sldId id="257" r:id="rId3"/>
@@ -25,9 +25,10 @@
     <p:sldId id="283" r:id="rId15"/>
     <p:sldId id="296" r:id="rId16"/>
     <p:sldId id="294" r:id="rId17"/>
-    <p:sldId id="298" r:id="rId18"/>
-    <p:sldId id="275" r:id="rId19"/>
-    <p:sldId id="262" r:id="rId20"/>
+    <p:sldId id="299" r:id="rId18"/>
+    <p:sldId id="298" r:id="rId19"/>
+    <p:sldId id="275" r:id="rId20"/>
+    <p:sldId id="262" r:id="rId21"/>
   </p:sldIdLst>
   <p:sldSz cx="12192000" cy="6858000"/>
   <p:notesSz cx="6858000" cy="9144000"/>
@@ -6163,6 +6164,1148 @@
       <p:grpSpPr/>
       <p:sp>
         <p:nvSpPr>
+          <p:cNvPr id="11" name="任意多边形 10"/>
+          <p:cNvSpPr/>
+          <p:nvPr/>
+        </p:nvSpPr>
+        <p:spPr>
+          <a:xfrm rot="5588898">
+            <a:off x="3994150" y="4538663"/>
+            <a:ext cx="269875" cy="409575"/>
+          </a:xfrm>
+          <a:custGeom>
+            <a:avLst/>
+            <a:gdLst>
+              <a:gd name="connsiteX0" fmla="*/ 0 w 269920"/>
+              <a:gd name="connsiteY0" fmla="*/ 409575 h 409575"/>
+              <a:gd name="connsiteX1" fmla="*/ 0 w 269920"/>
+              <a:gd name="connsiteY1" fmla="*/ 0 h 409575"/>
+              <a:gd name="connsiteX2" fmla="*/ 261445 w 269920"/>
+              <a:gd name="connsiteY2" fmla="*/ 255503 h 409575"/>
+              <a:gd name="connsiteX3" fmla="*/ 269920 w 269920"/>
+              <a:gd name="connsiteY3" fmla="*/ 409575 h 409575"/>
+            </a:gdLst>
+            <a:ahLst/>
+            <a:cxnLst>
+              <a:cxn ang="0">
+                <a:pos x="connsiteX0" y="connsiteY0"/>
+              </a:cxn>
+              <a:cxn ang="0">
+                <a:pos x="connsiteX1" y="connsiteY1"/>
+              </a:cxn>
+              <a:cxn ang="0">
+                <a:pos x="connsiteX2" y="connsiteY2"/>
+              </a:cxn>
+              <a:cxn ang="0">
+                <a:pos x="connsiteX3" y="connsiteY3"/>
+              </a:cxn>
+            </a:cxnLst>
+            <a:rect l="l" t="t" r="r" b="b"/>
+            <a:pathLst>
+              <a:path w="269920" h="409575">
+                <a:moveTo>
+                  <a:pt x="0" y="409575"/>
+                </a:moveTo>
+                <a:lnTo>
+                  <a:pt x="0" y="0"/>
+                </a:lnTo>
+                <a:lnTo>
+                  <a:pt x="261445" y="255503"/>
+                </a:lnTo>
+                <a:lnTo>
+                  <a:pt x="269920" y="409575"/>
+                </a:lnTo>
+                <a:close/>
+              </a:path>
+            </a:pathLst>
+          </a:custGeom>
+          <a:solidFill>
+            <a:schemeClr val="tx1">
+              <a:lumMod val="95000"/>
+              <a:lumOff val="5000"/>
+            </a:schemeClr>
+          </a:solidFill>
+          <a:ln>
+            <a:noFill/>
+          </a:ln>
+        </p:spPr>
+        <p:style>
+          <a:lnRef idx="2">
+            <a:schemeClr val="accent1">
+              <a:shade val="50000"/>
+            </a:schemeClr>
+          </a:lnRef>
+          <a:fillRef idx="1">
+            <a:schemeClr val="accent1"/>
+          </a:fillRef>
+          <a:effectRef idx="0">
+            <a:schemeClr val="accent1"/>
+          </a:effectRef>
+          <a:fontRef idx="minor">
+            <a:schemeClr val="lt1"/>
+          </a:fontRef>
+        </p:style>
+        <p:txBody>
+          <a:bodyPr anchor="ctr"/>
+          <a:lstStyle/>
+          <a:p>
+            <a:pPr marL="0" marR="0" lvl="0" indent="0" algn="ctr" defTabSz="914400" rtl="0" eaLnBrk="1" fontAlgn="auto" latinLnBrk="0" hangingPunct="1">
+              <a:lnSpc>
+                <a:spcPct val="100000"/>
+              </a:lnSpc>
+              <a:spcBef>
+                <a:spcPts val="0"/>
+              </a:spcBef>
+              <a:spcAft>
+                <a:spcPts val="0"/>
+              </a:spcAft>
+              <a:buClrTx/>
+              <a:buSzTx/>
+              <a:buFontTx/>
+              <a:buNone/>
+              <a:defRPr/>
+            </a:pPr>
+            <a:endParaRPr kumimoji="0" lang="zh-CN" altLang="en-US" sz="1800" b="0" i="0" u="none" strike="noStrike" kern="1200" cap="none" spc="0" normalizeH="0" baseline="0" noProof="0">
+              <a:ln>
+                <a:noFill/>
+              </a:ln>
+              <a:solidFill>
+                <a:schemeClr val="lt1"/>
+              </a:solidFill>
+              <a:effectLst/>
+              <a:uLnTx/>
+              <a:uFillTx/>
+              <a:latin typeface="+mn-lt"/>
+              <a:ea typeface="+mn-ea"/>
+              <a:cs typeface="+mn-cs"/>
+            </a:endParaRPr>
+          </a:p>
+        </p:txBody>
+      </p:sp>
+      <p:sp>
+        <p:nvSpPr>
+          <p:cNvPr id="3" name="直角三角形 2"/>
+          <p:cNvSpPr/>
+          <p:nvPr/>
+        </p:nvSpPr>
+        <p:spPr>
+          <a:xfrm>
+            <a:off x="3133725" y="1495425"/>
+            <a:ext cx="419100" cy="409575"/>
+          </a:xfrm>
+          <a:prstGeom prst="rtTriangle">
+            <a:avLst/>
+          </a:prstGeom>
+          <a:solidFill>
+            <a:schemeClr val="tx1">
+              <a:lumMod val="95000"/>
+              <a:lumOff val="5000"/>
+            </a:schemeClr>
+          </a:solidFill>
+          <a:ln>
+            <a:noFill/>
+          </a:ln>
+        </p:spPr>
+        <p:style>
+          <a:lnRef idx="2">
+            <a:schemeClr val="accent1">
+              <a:shade val="50000"/>
+            </a:schemeClr>
+          </a:lnRef>
+          <a:fillRef idx="1">
+            <a:schemeClr val="accent1"/>
+          </a:fillRef>
+          <a:effectRef idx="0">
+            <a:schemeClr val="accent1"/>
+          </a:effectRef>
+          <a:fontRef idx="minor">
+            <a:schemeClr val="lt1"/>
+          </a:fontRef>
+        </p:style>
+        <p:txBody>
+          <a:bodyPr anchor="ctr"/>
+          <a:lstStyle/>
+          <a:p>
+            <a:pPr marL="0" marR="0" lvl="0" indent="0" algn="ctr" defTabSz="914400" rtl="0" eaLnBrk="1" fontAlgn="auto" latinLnBrk="0" hangingPunct="1">
+              <a:lnSpc>
+                <a:spcPct val="100000"/>
+              </a:lnSpc>
+              <a:spcBef>
+                <a:spcPts val="0"/>
+              </a:spcBef>
+              <a:spcAft>
+                <a:spcPts val="0"/>
+              </a:spcAft>
+              <a:buClrTx/>
+              <a:buSzTx/>
+              <a:buFontTx/>
+              <a:buNone/>
+              <a:defRPr/>
+            </a:pPr>
+            <a:endParaRPr kumimoji="0" lang="zh-CN" altLang="en-US" sz="1800" b="0" i="0" u="none" strike="noStrike" kern="1200" cap="none" spc="0" normalizeH="0" baseline="0" noProof="0">
+              <a:ln>
+                <a:noFill/>
+              </a:ln>
+              <a:solidFill>
+                <a:schemeClr val="lt1"/>
+              </a:solidFill>
+              <a:effectLst/>
+              <a:uLnTx/>
+              <a:uFillTx/>
+              <a:latin typeface="+mn-lt"/>
+              <a:ea typeface="+mn-ea"/>
+              <a:cs typeface="+mn-cs"/>
+            </a:endParaRPr>
+          </a:p>
+        </p:txBody>
+      </p:sp>
+      <p:sp>
+        <p:nvSpPr>
+          <p:cNvPr id="2" name="矩形 1"/>
+          <p:cNvSpPr/>
+          <p:nvPr/>
+        </p:nvSpPr>
+        <p:spPr>
+          <a:xfrm>
+            <a:off x="0" y="1905000"/>
+            <a:ext cx="12192000" cy="2714625"/>
+          </a:xfrm>
+          <a:prstGeom prst="rect">
+            <a:avLst/>
+          </a:prstGeom>
+          <a:solidFill>
+            <a:srgbClr val="F8941C"/>
+          </a:solidFill>
+          <a:ln>
+            <a:noFill/>
+          </a:ln>
+        </p:spPr>
+        <p:style>
+          <a:lnRef idx="2">
+            <a:schemeClr val="accent1">
+              <a:shade val="50000"/>
+            </a:schemeClr>
+          </a:lnRef>
+          <a:fillRef idx="1">
+            <a:schemeClr val="accent1"/>
+          </a:fillRef>
+          <a:effectRef idx="0">
+            <a:schemeClr val="accent1"/>
+          </a:effectRef>
+          <a:fontRef idx="minor">
+            <a:schemeClr val="lt1"/>
+          </a:fontRef>
+        </p:style>
+        <p:txBody>
+          <a:bodyPr anchor="ctr"/>
+          <a:lstStyle/>
+          <a:p>
+            <a:pPr marL="0" marR="0" lvl="0" indent="0" algn="ctr" defTabSz="914400" rtl="0" eaLnBrk="1" fontAlgn="auto" latinLnBrk="0" hangingPunct="1">
+              <a:lnSpc>
+                <a:spcPct val="100000"/>
+              </a:lnSpc>
+              <a:spcBef>
+                <a:spcPts val="0"/>
+              </a:spcBef>
+              <a:spcAft>
+                <a:spcPts val="0"/>
+              </a:spcAft>
+              <a:buClrTx/>
+              <a:buSzTx/>
+              <a:buFontTx/>
+              <a:buNone/>
+              <a:defRPr/>
+            </a:pPr>
+            <a:endParaRPr kumimoji="0" lang="zh-CN" altLang="en-US" sz="1800" b="0" i="0" u="none" strike="noStrike" kern="1200" cap="none" spc="0" normalizeH="0" baseline="0" noProof="0">
+              <a:ln>
+                <a:noFill/>
+              </a:ln>
+              <a:solidFill>
+                <a:schemeClr val="lt1"/>
+              </a:solidFill>
+              <a:effectLst/>
+              <a:uLnTx/>
+              <a:uFillTx/>
+              <a:latin typeface="+mn-lt"/>
+              <a:ea typeface="+mn-ea"/>
+              <a:cs typeface="+mn-cs"/>
+            </a:endParaRPr>
+          </a:p>
+        </p:txBody>
+      </p:sp>
+      <p:sp>
+        <p:nvSpPr>
+          <p:cNvPr id="8" name="矩形 7"/>
+          <p:cNvSpPr/>
+          <p:nvPr/>
+        </p:nvSpPr>
+        <p:spPr>
+          <a:xfrm>
+            <a:off x="1000125" y="1485900"/>
+            <a:ext cx="3076575" cy="3381375"/>
+          </a:xfrm>
+          <a:custGeom>
+            <a:avLst/>
+            <a:gdLst>
+              <a:gd name="connsiteX0" fmla="*/ 0 w 3076575"/>
+              <a:gd name="connsiteY0" fmla="*/ 0 h 3381375"/>
+              <a:gd name="connsiteX1" fmla="*/ 3076575 w 3076575"/>
+              <a:gd name="connsiteY1" fmla="*/ 0 h 3381375"/>
+              <a:gd name="connsiteX2" fmla="*/ 3076575 w 3076575"/>
+              <a:gd name="connsiteY2" fmla="*/ 3381375 h 3381375"/>
+              <a:gd name="connsiteX3" fmla="*/ 0 w 3076575"/>
+              <a:gd name="connsiteY3" fmla="*/ 3381375 h 3381375"/>
+              <a:gd name="connsiteX4" fmla="*/ 0 w 3076575"/>
+              <a:gd name="connsiteY4" fmla="*/ 0 h 3381375"/>
+              <a:gd name="connsiteX0-1" fmla="*/ 0 w 3076575"/>
+              <a:gd name="connsiteY0-2" fmla="*/ 0 h 3381375"/>
+              <a:gd name="connsiteX1-3" fmla="*/ 2143125 w 3076575"/>
+              <a:gd name="connsiteY1-4" fmla="*/ 9525 h 3381375"/>
+              <a:gd name="connsiteX2-5" fmla="*/ 3076575 w 3076575"/>
+              <a:gd name="connsiteY2-6" fmla="*/ 3381375 h 3381375"/>
+              <a:gd name="connsiteX3-7" fmla="*/ 0 w 3076575"/>
+              <a:gd name="connsiteY3-8" fmla="*/ 3381375 h 3381375"/>
+              <a:gd name="connsiteX4-9" fmla="*/ 0 w 3076575"/>
+              <a:gd name="connsiteY4-10" fmla="*/ 0 h 3381375"/>
+            </a:gdLst>
+            <a:ahLst/>
+            <a:cxnLst>
+              <a:cxn ang="0">
+                <a:pos x="connsiteX0-1" y="connsiteY0-2"/>
+              </a:cxn>
+              <a:cxn ang="0">
+                <a:pos x="connsiteX1-3" y="connsiteY1-4"/>
+              </a:cxn>
+              <a:cxn ang="0">
+                <a:pos x="connsiteX2-5" y="connsiteY2-6"/>
+              </a:cxn>
+              <a:cxn ang="0">
+                <a:pos x="connsiteX3-7" y="connsiteY3-8"/>
+              </a:cxn>
+              <a:cxn ang="0">
+                <a:pos x="connsiteX4-9" y="connsiteY4-10"/>
+              </a:cxn>
+            </a:cxnLst>
+            <a:rect l="l" t="t" r="r" b="b"/>
+            <a:pathLst>
+              <a:path w="3076575" h="3381375">
+                <a:moveTo>
+                  <a:pt x="0" y="0"/>
+                </a:moveTo>
+                <a:lnTo>
+                  <a:pt x="2143125" y="9525"/>
+                </a:lnTo>
+                <a:lnTo>
+                  <a:pt x="3076575" y="3381375"/>
+                </a:lnTo>
+                <a:lnTo>
+                  <a:pt x="0" y="3381375"/>
+                </a:lnTo>
+                <a:lnTo>
+                  <a:pt x="0" y="0"/>
+                </a:lnTo>
+                <a:close/>
+              </a:path>
+            </a:pathLst>
+          </a:custGeom>
+          <a:solidFill>
+            <a:srgbClr val="353F48"/>
+          </a:solidFill>
+          <a:ln>
+            <a:noFill/>
+          </a:ln>
+        </p:spPr>
+        <p:style>
+          <a:lnRef idx="2">
+            <a:schemeClr val="accent1">
+              <a:shade val="50000"/>
+            </a:schemeClr>
+          </a:lnRef>
+          <a:fillRef idx="1">
+            <a:schemeClr val="accent1"/>
+          </a:fillRef>
+          <a:effectRef idx="0">
+            <a:schemeClr val="accent1"/>
+          </a:effectRef>
+          <a:fontRef idx="minor">
+            <a:schemeClr val="lt1"/>
+          </a:fontRef>
+        </p:style>
+        <p:txBody>
+          <a:bodyPr anchor="ctr"/>
+          <a:lstStyle/>
+          <a:p>
+            <a:pPr marL="0" marR="0" lvl="0" indent="0" algn="ctr" defTabSz="914400" rtl="0" eaLnBrk="1" fontAlgn="auto" latinLnBrk="0" hangingPunct="1">
+              <a:lnSpc>
+                <a:spcPct val="100000"/>
+              </a:lnSpc>
+              <a:spcBef>
+                <a:spcPts val="0"/>
+              </a:spcBef>
+              <a:spcAft>
+                <a:spcPts val="0"/>
+              </a:spcAft>
+              <a:buClrTx/>
+              <a:buSzTx/>
+              <a:buFontTx/>
+              <a:buNone/>
+              <a:defRPr/>
+            </a:pPr>
+            <a:endParaRPr kumimoji="0" lang="zh-CN" altLang="en-US" sz="1800" b="0" i="0" u="none" strike="noStrike" kern="1200" cap="none" spc="0" normalizeH="0" baseline="0" noProof="0">
+              <a:ln>
+                <a:noFill/>
+              </a:ln>
+              <a:solidFill>
+                <a:schemeClr val="lt1"/>
+              </a:solidFill>
+              <a:effectLst/>
+              <a:uLnTx/>
+              <a:uFillTx/>
+              <a:latin typeface="+mn-lt"/>
+              <a:ea typeface="+mn-ea"/>
+              <a:cs typeface="+mn-cs"/>
+            </a:endParaRPr>
+          </a:p>
+        </p:txBody>
+      </p:sp>
+      <p:grpSp>
+        <p:nvGrpSpPr>
+          <p:cNvPr id="12" name="组合 11"/>
+          <p:cNvGrpSpPr/>
+          <p:nvPr/>
+        </p:nvGrpSpPr>
+        <p:grpSpPr>
+          <a:xfrm>
+            <a:off x="1738851" y="2566191"/>
+            <a:ext cx="1144050" cy="1220780"/>
+            <a:chOff x="9909176" y="2032000"/>
+            <a:chExt cx="260350" cy="277813"/>
+          </a:xfrm>
+          <a:solidFill>
+            <a:schemeClr val="bg1"/>
+          </a:solidFill>
+        </p:grpSpPr>
+        <p:sp>
+          <p:nvSpPr>
+            <p:cNvPr id="13" name="Freeform 472"/>
+            <p:cNvSpPr/>
+            <p:nvPr/>
+          </p:nvSpPr>
+          <p:spPr bwMode="auto">
+            <a:xfrm>
+              <a:off x="9909176" y="2192338"/>
+              <a:ext cx="260350" cy="117475"/>
+            </a:xfrm>
+            <a:custGeom>
+              <a:avLst/>
+              <a:gdLst>
+                <a:gd name="T0" fmla="*/ 263 w 271"/>
+                <a:gd name="T1" fmla="*/ 34 h 122"/>
+                <a:gd name="T2" fmla="*/ 213 w 271"/>
+                <a:gd name="T3" fmla="*/ 6 h 122"/>
+                <a:gd name="T4" fmla="*/ 191 w 271"/>
+                <a:gd name="T5" fmla="*/ 1 h 122"/>
+                <a:gd name="T6" fmla="*/ 183 w 271"/>
+                <a:gd name="T7" fmla="*/ 19 h 122"/>
+                <a:gd name="T8" fmla="*/ 205 w 271"/>
+                <a:gd name="T9" fmla="*/ 27 h 122"/>
+                <a:gd name="T10" fmla="*/ 224 w 271"/>
+                <a:gd name="T11" fmla="*/ 41 h 122"/>
+                <a:gd name="T12" fmla="*/ 228 w 271"/>
+                <a:gd name="T13" fmla="*/ 51 h 122"/>
+                <a:gd name="T14" fmla="*/ 219 w 271"/>
+                <a:gd name="T15" fmla="*/ 60 h 122"/>
+                <a:gd name="T16" fmla="*/ 162 w 271"/>
+                <a:gd name="T17" fmla="*/ 78 h 122"/>
+                <a:gd name="T18" fmla="*/ 98 w 271"/>
+                <a:gd name="T19" fmla="*/ 76 h 122"/>
+                <a:gd name="T20" fmla="*/ 68 w 271"/>
+                <a:gd name="T21" fmla="*/ 68 h 122"/>
+                <a:gd name="T22" fmla="*/ 45 w 271"/>
+                <a:gd name="T23" fmla="*/ 53 h 122"/>
+                <a:gd name="T24" fmla="*/ 42 w 271"/>
+                <a:gd name="T25" fmla="*/ 47 h 122"/>
+                <a:gd name="T26" fmla="*/ 43 w 271"/>
+                <a:gd name="T27" fmla="*/ 43 h 122"/>
+                <a:gd name="T28" fmla="*/ 52 w 271"/>
+                <a:gd name="T29" fmla="*/ 34 h 122"/>
+                <a:gd name="T30" fmla="*/ 87 w 271"/>
+                <a:gd name="T31" fmla="*/ 19 h 122"/>
+                <a:gd name="T32" fmla="*/ 79 w 271"/>
+                <a:gd name="T33" fmla="*/ 0 h 122"/>
+                <a:gd name="T34" fmla="*/ 21 w 271"/>
+                <a:gd name="T35" fmla="*/ 20 h 122"/>
+                <a:gd name="T36" fmla="*/ 2 w 271"/>
+                <a:gd name="T37" fmla="*/ 40 h 122"/>
+                <a:gd name="T38" fmla="*/ 0 w 271"/>
+                <a:gd name="T39" fmla="*/ 52 h 122"/>
+                <a:gd name="T40" fmla="*/ 3 w 271"/>
+                <a:gd name="T41" fmla="*/ 68 h 122"/>
+                <a:gd name="T42" fmla="*/ 40 w 271"/>
+                <a:gd name="T43" fmla="*/ 104 h 122"/>
+                <a:gd name="T44" fmla="*/ 149 w 271"/>
+                <a:gd name="T45" fmla="*/ 121 h 122"/>
+                <a:gd name="T46" fmla="*/ 246 w 271"/>
+                <a:gd name="T47" fmla="*/ 96 h 122"/>
+                <a:gd name="T48" fmla="*/ 268 w 271"/>
+                <a:gd name="T49" fmla="*/ 65 h 122"/>
+                <a:gd name="T50" fmla="*/ 270 w 271"/>
+                <a:gd name="T51" fmla="*/ 54 h 122"/>
+                <a:gd name="T52" fmla="*/ 263 w 271"/>
+                <a:gd name="T53" fmla="*/ 34 h 122"/>
+              </a:gdLst>
+              <a:ahLst/>
+              <a:cxnLst>
+                <a:cxn ang="0">
+                  <a:pos x="T0" y="T1"/>
+                </a:cxn>
+                <a:cxn ang="0">
+                  <a:pos x="T2" y="T3"/>
+                </a:cxn>
+                <a:cxn ang="0">
+                  <a:pos x="T4" y="T5"/>
+                </a:cxn>
+                <a:cxn ang="0">
+                  <a:pos x="T6" y="T7"/>
+                </a:cxn>
+                <a:cxn ang="0">
+                  <a:pos x="T8" y="T9"/>
+                </a:cxn>
+                <a:cxn ang="0">
+                  <a:pos x="T10" y="T11"/>
+                </a:cxn>
+                <a:cxn ang="0">
+                  <a:pos x="T12" y="T13"/>
+                </a:cxn>
+                <a:cxn ang="0">
+                  <a:pos x="T14" y="T15"/>
+                </a:cxn>
+                <a:cxn ang="0">
+                  <a:pos x="T16" y="T17"/>
+                </a:cxn>
+                <a:cxn ang="0">
+                  <a:pos x="T18" y="T19"/>
+                </a:cxn>
+                <a:cxn ang="0">
+                  <a:pos x="T20" y="T21"/>
+                </a:cxn>
+                <a:cxn ang="0">
+                  <a:pos x="T22" y="T23"/>
+                </a:cxn>
+                <a:cxn ang="0">
+                  <a:pos x="T24" y="T25"/>
+                </a:cxn>
+                <a:cxn ang="0">
+                  <a:pos x="T26" y="T27"/>
+                </a:cxn>
+                <a:cxn ang="0">
+                  <a:pos x="T28" y="T29"/>
+                </a:cxn>
+                <a:cxn ang="0">
+                  <a:pos x="T30" y="T31"/>
+                </a:cxn>
+                <a:cxn ang="0">
+                  <a:pos x="T32" y="T33"/>
+                </a:cxn>
+                <a:cxn ang="0">
+                  <a:pos x="T34" y="T35"/>
+                </a:cxn>
+                <a:cxn ang="0">
+                  <a:pos x="T36" y="T37"/>
+                </a:cxn>
+                <a:cxn ang="0">
+                  <a:pos x="T38" y="T39"/>
+                </a:cxn>
+                <a:cxn ang="0">
+                  <a:pos x="T40" y="T41"/>
+                </a:cxn>
+                <a:cxn ang="0">
+                  <a:pos x="T42" y="T43"/>
+                </a:cxn>
+                <a:cxn ang="0">
+                  <a:pos x="T44" y="T45"/>
+                </a:cxn>
+                <a:cxn ang="0">
+                  <a:pos x="T46" y="T47"/>
+                </a:cxn>
+                <a:cxn ang="0">
+                  <a:pos x="T48" y="T49"/>
+                </a:cxn>
+                <a:cxn ang="0">
+                  <a:pos x="T50" y="T51"/>
+                </a:cxn>
+                <a:cxn ang="0">
+                  <a:pos x="T52" y="T53"/>
+                </a:cxn>
+              </a:cxnLst>
+              <a:rect l="0" t="0" r="r" b="b"/>
+              <a:pathLst>
+                <a:path w="271" h="122">
+                  <a:moveTo>
+                    <a:pt x="263" y="34"/>
+                  </a:moveTo>
+                  <a:cubicBezTo>
+                    <a:pt x="251" y="19"/>
+                    <a:pt x="231" y="11"/>
+                    <a:pt x="213" y="6"/>
+                  </a:cubicBezTo>
+                  <a:cubicBezTo>
+                    <a:pt x="206" y="4"/>
+                    <a:pt x="198" y="2"/>
+                    <a:pt x="191" y="1"/>
+                  </a:cubicBezTo>
+                  <a:cubicBezTo>
+                    <a:pt x="188" y="7"/>
+                    <a:pt x="185" y="13"/>
+                    <a:pt x="183" y="19"/>
+                  </a:cubicBezTo>
+                  <a:cubicBezTo>
+                    <a:pt x="190" y="21"/>
+                    <a:pt x="198" y="23"/>
+                    <a:pt x="205" y="27"/>
+                  </a:cubicBezTo>
+                  <a:cubicBezTo>
+                    <a:pt x="212" y="30"/>
+                    <a:pt x="219" y="35"/>
+                    <a:pt x="224" y="41"/>
+                  </a:cubicBezTo>
+                  <a:cubicBezTo>
+                    <a:pt x="226" y="43"/>
+                    <a:pt x="230" y="48"/>
+                    <a:pt x="228" y="51"/>
+                  </a:cubicBezTo>
+                  <a:cubicBezTo>
+                    <a:pt x="226" y="55"/>
+                    <a:pt x="222" y="58"/>
+                    <a:pt x="219" y="60"/>
+                  </a:cubicBezTo>
+                  <a:cubicBezTo>
+                    <a:pt x="203" y="72"/>
+                    <a:pt x="181" y="76"/>
+                    <a:pt x="162" y="78"/>
+                  </a:cubicBezTo>
+                  <a:cubicBezTo>
+                    <a:pt x="141" y="81"/>
+                    <a:pt x="119" y="80"/>
+                    <a:pt x="98" y="76"/>
+                  </a:cubicBezTo>
+                  <a:cubicBezTo>
+                    <a:pt x="88" y="75"/>
+                    <a:pt x="77" y="72"/>
+                    <a:pt x="68" y="68"/>
+                  </a:cubicBezTo>
+                  <a:cubicBezTo>
+                    <a:pt x="59" y="65"/>
+                    <a:pt x="50" y="60"/>
+                    <a:pt x="45" y="53"/>
+                  </a:cubicBezTo>
+                  <a:cubicBezTo>
+                    <a:pt x="43" y="51"/>
+                    <a:pt x="41" y="49"/>
+                    <a:pt x="42" y="47"/>
+                  </a:cubicBezTo>
+                  <a:cubicBezTo>
+                    <a:pt x="42" y="45"/>
+                    <a:pt x="42" y="44"/>
+                    <a:pt x="43" y="43"/>
+                  </a:cubicBezTo>
+                  <a:cubicBezTo>
+                    <a:pt x="45" y="39"/>
+                    <a:pt x="48" y="36"/>
+                    <a:pt x="52" y="34"/>
+                  </a:cubicBezTo>
+                  <a:cubicBezTo>
+                    <a:pt x="62" y="26"/>
+                    <a:pt x="74" y="21"/>
+                    <a:pt x="87" y="19"/>
+                  </a:cubicBezTo>
+                  <a:cubicBezTo>
+                    <a:pt x="84" y="13"/>
+                    <a:pt x="82" y="7"/>
+                    <a:pt x="79" y="0"/>
+                  </a:cubicBezTo>
+                  <a:cubicBezTo>
+                    <a:pt x="59" y="4"/>
+                    <a:pt x="39" y="9"/>
+                    <a:pt x="21" y="20"/>
+                  </a:cubicBezTo>
+                  <a:cubicBezTo>
+                    <a:pt x="14" y="25"/>
+                    <a:pt x="6" y="31"/>
+                    <a:pt x="2" y="40"/>
+                  </a:cubicBezTo>
+                  <a:cubicBezTo>
+                    <a:pt x="0" y="44"/>
+                    <a:pt x="0" y="48"/>
+                    <a:pt x="0" y="52"/>
+                  </a:cubicBezTo>
+                  <a:cubicBezTo>
+                    <a:pt x="1" y="58"/>
+                    <a:pt x="1" y="63"/>
+                    <a:pt x="3" y="68"/>
+                  </a:cubicBezTo>
+                  <a:cubicBezTo>
+                    <a:pt x="8" y="84"/>
+                    <a:pt x="26" y="97"/>
+                    <a:pt x="40" y="104"/>
+                  </a:cubicBezTo>
+                  <a:cubicBezTo>
+                    <a:pt x="74" y="118"/>
+                    <a:pt x="113" y="122"/>
+                    <a:pt x="149" y="121"/>
+                  </a:cubicBezTo>
+                  <a:cubicBezTo>
+                    <a:pt x="182" y="119"/>
+                    <a:pt x="218" y="114"/>
+                    <a:pt x="246" y="96"/>
+                  </a:cubicBezTo>
+                  <a:cubicBezTo>
+                    <a:pt x="256" y="90"/>
+                    <a:pt x="266" y="77"/>
+                    <a:pt x="268" y="65"/>
+                  </a:cubicBezTo>
+                  <a:cubicBezTo>
+                    <a:pt x="269" y="61"/>
+                    <a:pt x="269" y="58"/>
+                    <a:pt x="270" y="54"/>
+                  </a:cubicBezTo>
+                  <a:cubicBezTo>
+                    <a:pt x="271" y="47"/>
+                    <a:pt x="268" y="40"/>
+                    <a:pt x="263" y="34"/>
+                  </a:cubicBezTo>
+                  <a:close/>
+                </a:path>
+              </a:pathLst>
+            </a:custGeom>
+            <a:grpFill/>
+            <a:ln>
+              <a:noFill/>
+            </a:ln>
+            <a:extLst>
+              <a:ext uri="{91240B29-F687-4F45-9708-019B960494DF}">
+                <a14:hiddenLine xmlns:a14="http://schemas.microsoft.com/office/drawing/2010/main" w="9525">
+                  <a:solidFill>
+                    <a:srgbClr val="000000"/>
+                  </a:solidFill>
+                  <a:round/>
+                </a14:hiddenLine>
+              </a:ext>
+            </a:extLst>
+          </p:spPr>
+          <p:txBody>
+            <a:bodyPr/>
+            <a:lstStyle/>
+            <a:p>
+              <a:pPr marL="0" marR="0" lvl="0" indent="0" algn="l" defTabSz="914400" rtl="0" eaLnBrk="1" fontAlgn="auto" latinLnBrk="0" hangingPunct="1">
+                <a:lnSpc>
+                  <a:spcPct val="100000"/>
+                </a:lnSpc>
+                <a:spcBef>
+                  <a:spcPts val="0"/>
+                </a:spcBef>
+                <a:spcAft>
+                  <a:spcPts val="0"/>
+                </a:spcAft>
+                <a:buClrTx/>
+                <a:buSzTx/>
+                <a:buFontTx/>
+                <a:buNone/>
+                <a:defRPr/>
+              </a:pPr>
+              <a:endParaRPr kumimoji="0" lang="zh-CN" altLang="en-US" sz="1800" b="0" i="0" u="none" strike="noStrike" kern="1200" cap="none" spc="0" normalizeH="0" baseline="0" noProof="0">
+                <a:ln>
+                  <a:noFill/>
+                </a:ln>
+                <a:solidFill>
+                  <a:schemeClr val="tx1"/>
+                </a:solidFill>
+                <a:effectLst/>
+                <a:uLnTx/>
+                <a:uFillTx/>
+                <a:latin typeface="+mn-lt"/>
+                <a:ea typeface="+mn-ea"/>
+                <a:cs typeface="+mn-cs"/>
+              </a:endParaRPr>
+            </a:p>
+          </p:txBody>
+        </p:sp>
+        <p:sp>
+          <p:nvSpPr>
+            <p:cNvPr id="14" name="Freeform 473"/>
+            <p:cNvSpPr/>
+            <p:nvPr/>
+          </p:nvSpPr>
+          <p:spPr bwMode="auto">
+            <a:xfrm>
+              <a:off x="10156826" y="2219325"/>
+              <a:ext cx="9525" cy="12700"/>
+            </a:xfrm>
+            <a:custGeom>
+              <a:avLst/>
+              <a:gdLst>
+                <a:gd name="T0" fmla="*/ 5 w 11"/>
+                <a:gd name="T1" fmla="*/ 6 h 13"/>
+                <a:gd name="T2" fmla="*/ 5 w 11"/>
+                <a:gd name="T3" fmla="*/ 6 h 13"/>
+              </a:gdLst>
+              <a:ahLst/>
+              <a:cxnLst>
+                <a:cxn ang="0">
+                  <a:pos x="T0" y="T1"/>
+                </a:cxn>
+                <a:cxn ang="0">
+                  <a:pos x="T2" y="T3"/>
+                </a:cxn>
+              </a:cxnLst>
+              <a:rect l="0" t="0" r="r" b="b"/>
+              <a:pathLst>
+                <a:path w="11" h="13">
+                  <a:moveTo>
+                    <a:pt x="5" y="6"/>
+                  </a:moveTo>
+                  <a:cubicBezTo>
+                    <a:pt x="11" y="13"/>
+                    <a:pt x="0" y="0"/>
+                    <a:pt x="5" y="6"/>
+                  </a:cubicBezTo>
+                  <a:close/>
+                </a:path>
+              </a:pathLst>
+            </a:custGeom>
+            <a:grpFill/>
+            <a:ln>
+              <a:noFill/>
+            </a:ln>
+            <a:extLst>
+              <a:ext uri="{91240B29-F687-4F45-9708-019B960494DF}">
+                <a14:hiddenLine xmlns:a14="http://schemas.microsoft.com/office/drawing/2010/main" w="9525">
+                  <a:solidFill>
+                    <a:srgbClr val="000000"/>
+                  </a:solidFill>
+                  <a:round/>
+                </a14:hiddenLine>
+              </a:ext>
+            </a:extLst>
+          </p:spPr>
+          <p:txBody>
+            <a:bodyPr/>
+            <a:lstStyle/>
+            <a:p>
+              <a:pPr marL="0" marR="0" lvl="0" indent="0" algn="l" defTabSz="914400" rtl="0" eaLnBrk="1" fontAlgn="auto" latinLnBrk="0" hangingPunct="1">
+                <a:lnSpc>
+                  <a:spcPct val="100000"/>
+                </a:lnSpc>
+                <a:spcBef>
+                  <a:spcPts val="0"/>
+                </a:spcBef>
+                <a:spcAft>
+                  <a:spcPts val="0"/>
+                </a:spcAft>
+                <a:buClrTx/>
+                <a:buSzTx/>
+                <a:buFontTx/>
+                <a:buNone/>
+                <a:defRPr/>
+              </a:pPr>
+              <a:endParaRPr kumimoji="0" lang="zh-CN" altLang="en-US" sz="1800" b="0" i="0" u="none" strike="noStrike" kern="1200" cap="none" spc="0" normalizeH="0" baseline="0" noProof="0">
+                <a:ln>
+                  <a:noFill/>
+                </a:ln>
+                <a:solidFill>
+                  <a:schemeClr val="tx1"/>
+                </a:solidFill>
+                <a:effectLst/>
+                <a:uLnTx/>
+                <a:uFillTx/>
+                <a:latin typeface="+mn-lt"/>
+                <a:ea typeface="+mn-ea"/>
+                <a:cs typeface="+mn-cs"/>
+              </a:endParaRPr>
+            </a:p>
+          </p:txBody>
+        </p:sp>
+        <p:sp>
+          <p:nvSpPr>
+            <p:cNvPr id="15" name="Freeform 474"/>
+            <p:cNvSpPr>
+              <a:spLocks noEditPoints="1"/>
+            </p:cNvSpPr>
+            <p:nvPr/>
+          </p:nvSpPr>
+          <p:spPr bwMode="auto">
+            <a:xfrm>
+              <a:off x="9977438" y="2032000"/>
+              <a:ext cx="122238" cy="220662"/>
+            </a:xfrm>
+            <a:custGeom>
+              <a:avLst/>
+              <a:gdLst>
+                <a:gd name="T0" fmla="*/ 64 w 128"/>
+                <a:gd name="T1" fmla="*/ 231 h 231"/>
+                <a:gd name="T2" fmla="*/ 128 w 128"/>
+                <a:gd name="T3" fmla="*/ 63 h 231"/>
+                <a:gd name="T4" fmla="*/ 65 w 128"/>
+                <a:gd name="T5" fmla="*/ 0 h 231"/>
+                <a:gd name="T6" fmla="*/ 64 w 128"/>
+                <a:gd name="T7" fmla="*/ 0 h 231"/>
+                <a:gd name="T8" fmla="*/ 64 w 128"/>
+                <a:gd name="T9" fmla="*/ 0 h 231"/>
+                <a:gd name="T10" fmla="*/ 64 w 128"/>
+                <a:gd name="T11" fmla="*/ 0 h 231"/>
+                <a:gd name="T12" fmla="*/ 63 w 128"/>
+                <a:gd name="T13" fmla="*/ 0 h 231"/>
+                <a:gd name="T14" fmla="*/ 0 w 128"/>
+                <a:gd name="T15" fmla="*/ 63 h 231"/>
+                <a:gd name="T16" fmla="*/ 64 w 128"/>
+                <a:gd name="T17" fmla="*/ 231 h 231"/>
+                <a:gd name="T18" fmla="*/ 64 w 128"/>
+                <a:gd name="T19" fmla="*/ 29 h 231"/>
+                <a:gd name="T20" fmla="*/ 93 w 128"/>
+                <a:gd name="T21" fmla="*/ 58 h 231"/>
+                <a:gd name="T22" fmla="*/ 64 w 128"/>
+                <a:gd name="T23" fmla="*/ 86 h 231"/>
+                <a:gd name="T24" fmla="*/ 35 w 128"/>
+                <a:gd name="T25" fmla="*/ 58 h 231"/>
+                <a:gd name="T26" fmla="*/ 64 w 128"/>
+                <a:gd name="T27" fmla="*/ 29 h 231"/>
+              </a:gdLst>
+              <a:ahLst/>
+              <a:cxnLst>
+                <a:cxn ang="0">
+                  <a:pos x="T0" y="T1"/>
+                </a:cxn>
+                <a:cxn ang="0">
+                  <a:pos x="T2" y="T3"/>
+                </a:cxn>
+                <a:cxn ang="0">
+                  <a:pos x="T4" y="T5"/>
+                </a:cxn>
+                <a:cxn ang="0">
+                  <a:pos x="T6" y="T7"/>
+                </a:cxn>
+                <a:cxn ang="0">
+                  <a:pos x="T8" y="T9"/>
+                </a:cxn>
+                <a:cxn ang="0">
+                  <a:pos x="T10" y="T11"/>
+                </a:cxn>
+                <a:cxn ang="0">
+                  <a:pos x="T12" y="T13"/>
+                </a:cxn>
+                <a:cxn ang="0">
+                  <a:pos x="T14" y="T15"/>
+                </a:cxn>
+                <a:cxn ang="0">
+                  <a:pos x="T16" y="T17"/>
+                </a:cxn>
+                <a:cxn ang="0">
+                  <a:pos x="T18" y="T19"/>
+                </a:cxn>
+                <a:cxn ang="0">
+                  <a:pos x="T20" y="T21"/>
+                </a:cxn>
+                <a:cxn ang="0">
+                  <a:pos x="T22" y="T23"/>
+                </a:cxn>
+                <a:cxn ang="0">
+                  <a:pos x="T24" y="T25"/>
+                </a:cxn>
+                <a:cxn ang="0">
+                  <a:pos x="T26" y="T27"/>
+                </a:cxn>
+              </a:cxnLst>
+              <a:rect l="0" t="0" r="r" b="b"/>
+              <a:pathLst>
+                <a:path w="128" h="231">
+                  <a:moveTo>
+                    <a:pt x="64" y="231"/>
+                  </a:moveTo>
+                  <a:cubicBezTo>
+                    <a:pt x="64" y="231"/>
+                    <a:pt x="128" y="97"/>
+                    <a:pt x="128" y="63"/>
+                  </a:cubicBezTo>
+                  <a:cubicBezTo>
+                    <a:pt x="128" y="29"/>
+                    <a:pt x="100" y="0"/>
+                    <a:pt x="65" y="0"/>
+                  </a:cubicBezTo>
+                  <a:cubicBezTo>
+                    <a:pt x="65" y="0"/>
+                    <a:pt x="65" y="0"/>
+                    <a:pt x="64" y="0"/>
+                  </a:cubicBezTo>
+                  <a:cubicBezTo>
+                    <a:pt x="64" y="0"/>
+                    <a:pt x="64" y="0"/>
+                    <a:pt x="64" y="0"/>
+                  </a:cubicBezTo>
+                  <a:cubicBezTo>
+                    <a:pt x="64" y="0"/>
+                    <a:pt x="64" y="0"/>
+                    <a:pt x="64" y="0"/>
+                  </a:cubicBezTo>
+                  <a:cubicBezTo>
+                    <a:pt x="64" y="0"/>
+                    <a:pt x="63" y="0"/>
+                    <a:pt x="63" y="0"/>
+                  </a:cubicBezTo>
+                  <a:cubicBezTo>
+                    <a:pt x="28" y="0"/>
+                    <a:pt x="0" y="29"/>
+                    <a:pt x="0" y="63"/>
+                  </a:cubicBezTo>
+                  <a:cubicBezTo>
+                    <a:pt x="0" y="98"/>
+                    <a:pt x="64" y="231"/>
+                    <a:pt x="64" y="231"/>
+                  </a:cubicBezTo>
+                  <a:close/>
+                  <a:moveTo>
+                    <a:pt x="64" y="29"/>
+                  </a:moveTo>
+                  <a:cubicBezTo>
+                    <a:pt x="80" y="29"/>
+                    <a:pt x="93" y="42"/>
+                    <a:pt x="93" y="58"/>
+                  </a:cubicBezTo>
+                  <a:cubicBezTo>
+                    <a:pt x="93" y="74"/>
+                    <a:pt x="80" y="86"/>
+                    <a:pt x="64" y="86"/>
+                  </a:cubicBezTo>
+                  <a:cubicBezTo>
+                    <a:pt x="48" y="86"/>
+                    <a:pt x="35" y="74"/>
+                    <a:pt x="35" y="58"/>
+                  </a:cubicBezTo>
+                  <a:cubicBezTo>
+                    <a:pt x="35" y="42"/>
+                    <a:pt x="48" y="29"/>
+                    <a:pt x="64" y="29"/>
+                  </a:cubicBezTo>
+                  <a:close/>
+                </a:path>
+              </a:pathLst>
+            </a:custGeom>
+            <a:grpFill/>
+            <a:ln>
+              <a:noFill/>
+            </a:ln>
+            <a:extLst>
+              <a:ext uri="{91240B29-F687-4F45-9708-019B960494DF}">
+                <a14:hiddenLine xmlns:a14="http://schemas.microsoft.com/office/drawing/2010/main" w="9525">
+                  <a:solidFill>
+                    <a:srgbClr val="000000"/>
+                  </a:solidFill>
+                  <a:round/>
+                </a14:hiddenLine>
+              </a:ext>
+            </a:extLst>
+          </p:spPr>
+          <p:txBody>
+            <a:bodyPr/>
+            <a:lstStyle/>
+            <a:p>
+              <a:pPr marL="0" marR="0" lvl="0" indent="0" algn="l" defTabSz="914400" rtl="0" eaLnBrk="1" fontAlgn="auto" latinLnBrk="0" hangingPunct="1">
+                <a:lnSpc>
+                  <a:spcPct val="100000"/>
+                </a:lnSpc>
+                <a:spcBef>
+                  <a:spcPts val="0"/>
+                </a:spcBef>
+                <a:spcAft>
+                  <a:spcPts val="0"/>
+                </a:spcAft>
+                <a:buClrTx/>
+                <a:buSzTx/>
+                <a:buFontTx/>
+                <a:buNone/>
+                <a:defRPr/>
+              </a:pPr>
+              <a:endParaRPr kumimoji="0" lang="zh-CN" altLang="en-US" sz="1800" b="0" i="0" u="none" strike="noStrike" kern="1200" cap="none" spc="0" normalizeH="0" baseline="0" noProof="0">
+                <a:ln>
+                  <a:noFill/>
+                </a:ln>
+                <a:solidFill>
+                  <a:schemeClr val="tx1"/>
+                </a:solidFill>
+                <a:effectLst/>
+                <a:uLnTx/>
+                <a:uFillTx/>
+                <a:latin typeface="+mn-lt"/>
+                <a:ea typeface="+mn-ea"/>
+                <a:cs typeface="+mn-cs"/>
+              </a:endParaRPr>
+            </a:p>
+          </p:txBody>
+        </p:sp>
+      </p:grpSp>
+      <p:sp>
+        <p:nvSpPr>
+          <p:cNvPr id="16391" name="文本框 128"/>
+          <p:cNvSpPr txBox="1"/>
+          <p:nvPr/>
+        </p:nvSpPr>
+        <p:spPr>
+          <a:xfrm>
+            <a:off x="5589588" y="2403475"/>
+            <a:ext cx="4803775" cy="829945"/>
+          </a:xfrm>
+          <a:prstGeom prst="rect">
+            <a:avLst/>
+          </a:prstGeom>
+          <a:noFill/>
+          <a:ln w="9525">
+            <a:noFill/>
+          </a:ln>
+        </p:spPr>
+        <p:txBody>
+          <a:bodyPr anchor="t" anchorCtr="0">
+            <a:spAutoFit/>
+          </a:bodyPr>
+          <a:p>
+            <a:r>
+              <a:rPr lang="en-US" altLang="zh-CN" sz="4800" b="1" dirty="0">
+                <a:solidFill>
+                  <a:schemeClr val="bg1"/>
+                </a:solidFill>
+                <a:latin typeface="Microsoft YaHei" pitchFamily="34" charset="-122"/>
+                <a:ea typeface="Microsoft YaHei" pitchFamily="34" charset="-122"/>
+              </a:rPr>
+              <a:t>Conclusion</a:t>
+            </a:r>
+            <a:endParaRPr lang="en-US" altLang="zh-CN" sz="4800" b="1" dirty="0">
+              <a:solidFill>
+                <a:schemeClr val="bg1"/>
+              </a:solidFill>
+              <a:latin typeface="Microsoft YaHei" pitchFamily="34" charset="-122"/>
+              <a:ea typeface="Microsoft YaHei" pitchFamily="34" charset="-122"/>
+            </a:endParaRPr>
+          </a:p>
+        </p:txBody>
+      </p:sp>
+    </p:spTree>
+  </p:cSld>
+  <p:clrMapOvr>
+    <a:masterClrMapping/>
+  </p:clrMapOvr>
+</p:sld>
+</file>
+
+<file path=ppt/slides/slide16.xml><?xml version="1.0" encoding="utf-8"?>
+<p:sld xmlns:a="http://schemas.openxmlformats.org/drawingml/2006/main" xmlns:r="http://schemas.openxmlformats.org/officeDocument/2006/relationships" xmlns:p="http://schemas.openxmlformats.org/presentationml/2006/main">
+  <p:cSld>
+    <p:spTree>
+      <p:nvGrpSpPr>
+        <p:cNvPr id="1" name=""/>
+        <p:cNvGrpSpPr/>
+        <p:nvPr/>
+      </p:nvGrpSpPr>
+      <p:grpSpPr/>
+      <p:sp>
+        <p:nvSpPr>
           <p:cNvPr id="2" name="Title 1"/>
           <p:cNvSpPr>
             <a:spLocks noGrp="1"/>
@@ -6456,6 +7599,118 @@
           </a:p>
         </p:txBody>
       </p:sp>
+      <p:sp>
+        <p:nvSpPr>
+          <p:cNvPr id="21" name="Rectangles 20"/>
+          <p:cNvSpPr/>
+          <p:nvPr/>
+        </p:nvSpPr>
+        <p:spPr>
+          <a:xfrm>
+            <a:off x="6933565" y="5096510"/>
+            <a:ext cx="1991995" cy="252095"/>
+          </a:xfrm>
+          <a:prstGeom prst="rect">
+            <a:avLst/>
+          </a:prstGeom>
+          <a:noFill/>
+          <a:ln>
+            <a:solidFill>
+              <a:schemeClr val="accent2">
+                <a:lumMod val="75000"/>
+              </a:schemeClr>
+            </a:solidFill>
+          </a:ln>
+          <a:extLst>
+            <a:ext uri="{909E8E84-426E-40DD-AFC4-6F175D3DCCD1}">
+              <a14:hiddenFill xmlns:a14="http://schemas.microsoft.com/office/drawing/2010/main">
+                <a:solidFill>
+                  <a:schemeClr val="accent1"/>
+                </a:solidFill>
+              </a14:hiddenFill>
+            </a:ext>
+          </a:extLst>
+        </p:spPr>
+        <p:style>
+          <a:lnRef idx="2">
+            <a:schemeClr val="accent1">
+              <a:lumMod val="75000"/>
+            </a:schemeClr>
+          </a:lnRef>
+          <a:fillRef idx="1">
+            <a:schemeClr val="accent1"/>
+          </a:fillRef>
+          <a:effectRef idx="0">
+            <a:srgbClr val="FFFFFF"/>
+          </a:effectRef>
+          <a:fontRef idx="minor">
+            <a:schemeClr val="lt1"/>
+          </a:fontRef>
+        </p:style>
+        <p:txBody>
+          <a:bodyPr rtlCol="0" anchor="ctr"/>
+          <a:p>
+            <a:pPr algn="ctr"/>
+            <a:endParaRPr lang="en-US"/>
+          </a:p>
+        </p:txBody>
+      </p:sp>
+      <p:sp>
+        <p:nvSpPr>
+          <p:cNvPr id="6" name="Rectangles 5"/>
+          <p:cNvSpPr/>
+          <p:nvPr/>
+        </p:nvSpPr>
+        <p:spPr>
+          <a:xfrm>
+            <a:off x="9508490" y="5096510"/>
+            <a:ext cx="572135" cy="252095"/>
+          </a:xfrm>
+          <a:prstGeom prst="rect">
+            <a:avLst/>
+          </a:prstGeom>
+          <a:noFill/>
+          <a:ln>
+            <a:solidFill>
+              <a:schemeClr val="accent2">
+                <a:lumMod val="75000"/>
+              </a:schemeClr>
+            </a:solidFill>
+          </a:ln>
+          <a:extLst>
+            <a:ext uri="{909E8E84-426E-40DD-AFC4-6F175D3DCCD1}">
+              <a14:hiddenFill xmlns:a14="http://schemas.microsoft.com/office/drawing/2010/main">
+                <a:solidFill>
+                  <a:schemeClr val="accent1"/>
+                </a:solidFill>
+              </a14:hiddenFill>
+            </a:ext>
+          </a:extLst>
+        </p:spPr>
+        <p:style>
+          <a:lnRef idx="2">
+            <a:schemeClr val="accent1">
+              <a:lumMod val="75000"/>
+            </a:schemeClr>
+          </a:lnRef>
+          <a:fillRef idx="1">
+            <a:schemeClr val="accent1"/>
+          </a:fillRef>
+          <a:effectRef idx="0">
+            <a:srgbClr val="FFFFFF"/>
+          </a:effectRef>
+          <a:fontRef idx="minor">
+            <a:schemeClr val="lt1"/>
+          </a:fontRef>
+        </p:style>
+        <p:txBody>
+          <a:bodyPr rtlCol="0" anchor="ctr"/>
+          <a:p>
+            <a:pPr algn="ctr"/>
+            <a:endParaRPr lang="en-US"/>
+          </a:p>
+        </p:txBody>
+      </p:sp>
     </p:spTree>
   </p:cSld>
   <p:clrMapOvr>
@@ -6464,7 +7719,7 @@
 </p:sld>
 </file>
 
-<file path=ppt/slides/slide16.xml><?xml version="1.0" encoding="utf-8"?>
+<file path=ppt/slides/slide17.xml><?xml version="1.0" encoding="utf-8"?>
 <p:sld xmlns:a="http://schemas.openxmlformats.org/drawingml/2006/main" xmlns:r="http://schemas.openxmlformats.org/officeDocument/2006/relationships" xmlns:p="http://schemas.openxmlformats.org/presentationml/2006/main">
   <p:cSld>
     <p:spTree>
@@ -7945,7 +9200,7 @@
 </p:sld>
 </file>
 
-<file path=ppt/slides/slide17.xml><?xml version="1.0" encoding="utf-8"?>
+<file path=ppt/slides/slide18.xml><?xml version="1.0" encoding="utf-8"?>
 <p:sld xmlns:a="http://schemas.openxmlformats.org/drawingml/2006/main" xmlns:r="http://schemas.openxmlformats.org/officeDocument/2006/relationships" xmlns:p="http://schemas.openxmlformats.org/presentationml/2006/main">
   <p:cSld>
     <p:bg>
@@ -21370,8 +22625,8 @@
         </p:nvSpPr>
         <p:spPr>
           <a:xfrm>
-            <a:off x="5589588" y="2403475"/>
-            <a:ext cx="4803775" cy="1568450"/>
+            <a:off x="4732338" y="2847340"/>
+            <a:ext cx="4803775" cy="829945"/>
           </a:xfrm>
           <a:prstGeom prst="rect">
             <a:avLst/>
@@ -21394,7 +22649,7 @@
                 <a:latin typeface="Microsoft YaHei" pitchFamily="34" charset="-122"/>
                 <a:ea typeface="Microsoft YaHei" pitchFamily="34" charset="-122"/>
               </a:rPr>
-              <a:t>Demo &amp; Conclusion</a:t>
+              <a:t>Demo</a:t>
             </a:r>
             <a:endParaRPr lang="en-US" altLang="zh-CN" sz="4800" b="1" dirty="0">
               <a:solidFill>

--- a/Class_Presentation.pptx
+++ b/Class_Presentation.pptx
@@ -1450,6 +1450,13 @@
         <p:spPr/>
         <p:txBody>
           <a:bodyPr/>
+          <a:p>
+            <a:r>
+              <a:rPr lang="en-US" altLang="en-US"/>
+              <a:t>Spring = Powerful but complex, while Spring Boot = Spring made easy</a:t>
+            </a:r>
+            <a:endParaRPr lang="en-US" altLang="en-US"/>
+          </a:p>
           <a:p>
             <a:r>
               <a:rPr lang="en-US" altLang="en-US"/>
